--- a/slides/ARC3133_Class08.pptx
+++ b/slides/ARC3133_Class08.pptx
@@ -17,8 +17,6 @@
     <p:sldId id="265" r:id="rId16"/>
     <p:sldId id="266" r:id="rId17"/>
     <p:sldId id="267" r:id="rId18"/>
-    <p:sldId id="268" r:id="rId19"/>
-    <p:sldId id="269" r:id="rId20"/>
   </p:sldIdLst>
   <p:sldSz cx="12191969" cy="6858000" type="screen4x3"/>
   <p:notesSz cx="6858000" cy="9144000"/>
@@ -3324,7 +3322,7 @@
                 </a:solidFill>
                 <a:latin typeface="Arial"/>
               </a:rPr>
-              <a:t>2D FIELD + PLOTTER</a:t>
+              <a:t>2D FIELD DRAWING</a:t>
             </a:r>
           </a:p>
         </p:txBody>
@@ -3535,7 +3533,7 @@
                 </a:solidFill>
                 <a:latin typeface="Arial"/>
               </a:rPr>
-              <a:t>P3 CONTINUES — A FIELD FIRST, THEN LINES A PEN CAN DRAW</a:t>
+              <a:t>P3 CONTINUES — A FIELD FIRST, THEN A DRAWING MADE OF LINES</a:t>
             </a:r>
           </a:p>
         </p:txBody>
@@ -3605,7 +3603,7 @@
                 </a:solidFill>
                 <a:latin typeface="Arial"/>
               </a:rPr>
-              <a:t>P3c + P3d ISSUED TODAY</a:t>
+              <a:t>P3c ISSUED TODAY</a:t>
             </a:r>
           </a:p>
         </p:txBody>
@@ -3739,13 +3737,13 @@
           <a:p>
             <a:pPr algn="l"/>
             <a:r>
-              <a:rPr sz="1200">
+              <a:rPr sz="1350">
                 <a:solidFill>
                   <a:srgbClr val="6B6B6B"/>
                 </a:solidFill>
                 <a:latin typeface="Calibri"/>
               </a:rPr>
-              <a:t>Visual documentation 20% · computational understanding 20% · technical execution 15% · fabrication quality 30% · experimentation 5% · requirements and identity 10%.</a:t>
+              <a:t>Visual quality 35% · computational understanding 25% · technical execution 20% · experimentation 10% · requirements and identity 10%.</a:t>
             </a:r>
           </a:p>
         </p:txBody>
@@ -3995,7 +3993,7 @@
                 </a:solidFill>
                 <a:latin typeface="Calibri"/>
               </a:rPr>
-              <a:t>Build a 2D attractor field on a flat grid and translate it into lines a pen plotter can draw — vary line length, rotation, spacing or hatch density with the measured distance.</a:t>
+              <a:t>Build a 2D attractor field on a flat grid and translate it into lines — vary line length, rotation, spacing or hatch density with the measured distance.</a:t>
             </a:r>
           </a:p>
         </p:txBody>
@@ -4495,7 +4493,7 @@
                 </a:solidFill>
                 <a:latin typeface="Calibri"/>
               </a:rPr>
-              <a:t>Show the grayscale field with a legend beside the line drawing. Label input and output ranges, clamping and falloff.</a:t>
+              <a:t>Make one 17 × 11 inch sheet presenting the line drawing, with the grayscale field and a legend beside it. Label input and output ranges, clamping and falloff.</a:t>
             </a:r>
           </a:p>
         </p:txBody>
@@ -4745,7 +4743,7 @@
                 </a:solidFill>
                 <a:latin typeface="Calibri"/>
               </a:rPr>
-              <a:t>Export an SVG at the plotted size, test a small plot, then plot the final drawing at 17 × 11 inches (or the confirmed plotter size) with one pen weight or a declared set of pens.</a:t>
+              <a:t>Keep the drawing as clean vector lines and submit the SVG with the sheet PDF and the editable graph.</a:t>
             </a:r>
           </a:p>
         </p:txBody>
@@ -4995,7 +4993,7 @@
                 </a:solidFill>
                 <a:latin typeface="Calibri"/>
               </a:rPr>
-              <a:t>Submit the plotted drawing, the SVG, a photograph or scan of the plot and the editable graph. Move an attractor or change the mapping live at midterm.</a:t>
+              <a:t>Optional — plot the drawing on the pen plotter and add a photograph or scan of the plot to the sheet.</a:t>
             </a:r>
           </a:p>
         </p:txBody>
@@ -5118,7 +5116,7 @@
                 </a:solidFill>
                 <a:latin typeface="Arial"/>
               </a:rPr>
-              <a:t>CHECKPOINT · WEEK 9 — Oct 20 — Bring a grayscale field, the line translation and a small test plot.</a:t>
+              <a:t>CHECKPOINT · WEEK 9 — Oct 20 — Bring the grayscale field and a first line drawing of it.</a:t>
             </a:r>
           </a:p>
         </p:txBody>
@@ -5137,7 +5135,7 @@
     <p:bg>
       <p:bgPr>
         <a:solidFill>
-          <a:srgbClr val="000000"/>
+          <a:srgbClr val="C6F035"/>
         </a:solidFill>
         <a:effectLst/>
       </p:bgPr>
@@ -5157,96 +5155,52 @@
         </p:nvSpPr>
         <p:spPr>
           <a:xfrm>
-            <a:off x="662940" y="635508"/>
-            <a:ext cx="2194560" cy="384048"/>
+            <a:off x="594360" y="566928"/>
+            <a:ext cx="10972800" cy="0"/>
           </a:xfrm>
           <a:prstGeom prst="rect">
             <a:avLst/>
           </a:prstGeom>
-          <a:solidFill>
-            <a:srgbClr val="000000"/>
-          </a:solidFill>
-          <a:ln w="6350">
-            <a:solidFill>
-              <a:srgbClr val="000000"/>
-            </a:solidFill>
-          </a:ln>
-          <a:effectLst/>
-        </p:spPr>
-        <p:style>
-          <a:lnRef idx="1">
-            <a:schemeClr val="accent1"/>
-          </a:lnRef>
-          <a:fillRef idx="3">
-            <a:schemeClr val="accent1"/>
-          </a:fillRef>
-          <a:effectRef idx="2">
-            <a:schemeClr val="accent1"/>
-          </a:effectRef>
-          <a:fontRef idx="minor">
-            <a:schemeClr val="lt1"/>
-          </a:fontRef>
-        </p:style>
-        <p:txBody>
-          <a:bodyPr rtlCol="0" anchor="ctr"/>
-          <a:lstStyle/>
-          <a:p/>
-        </p:txBody>
-      </p:sp>
-      <p:sp>
-        <p:nvSpPr>
-          <p:cNvPr id="3" name="Rectangle 2"/>
-          <p:cNvSpPr/>
-          <p:nvPr/>
-        </p:nvSpPr>
-        <p:spPr>
-          <a:xfrm>
-            <a:off x="594360" y="566928"/>
-            <a:ext cx="2194560" cy="384048"/>
-          </a:xfrm>
-          <a:prstGeom prst="rect">
-            <a:avLst/>
-          </a:prstGeom>
-          <a:solidFill>
-            <a:srgbClr val="C6F035"/>
-          </a:solidFill>
-          <a:ln w="34925">
-            <a:solidFill>
-              <a:srgbClr val="000000"/>
-            </a:solidFill>
-          </a:ln>
-          <a:effectLst/>
-        </p:spPr>
-        <p:style>
-          <a:lnRef idx="1">
-            <a:schemeClr val="accent1"/>
-          </a:lnRef>
-          <a:fillRef idx="3">
-            <a:schemeClr val="accent1"/>
-          </a:fillRef>
-          <a:effectRef idx="2">
-            <a:schemeClr val="accent1"/>
-          </a:effectRef>
-          <a:fontRef idx="minor">
-            <a:schemeClr val="lt1"/>
-          </a:fontRef>
-        </p:style>
-        <p:txBody>
-          <a:bodyPr rtlCol="0" anchor="ctr"/>
-          <a:lstStyle/>
-          <a:p/>
-        </p:txBody>
-      </p:sp>
-      <p:sp>
-        <p:nvSpPr>
-          <p:cNvPr id="4" name="TextBox 3"/>
+          <a:noFill/>
+          <a:ln w="50800">
+            <a:solidFill>
+              <a:srgbClr val="000000"/>
+            </a:solidFill>
+          </a:ln>
+          <a:effectLst/>
+        </p:spPr>
+        <p:style>
+          <a:lnRef idx="1">
+            <a:schemeClr val="accent1"/>
+          </a:lnRef>
+          <a:fillRef idx="3">
+            <a:schemeClr val="accent1"/>
+          </a:fillRef>
+          <a:effectRef idx="2">
+            <a:schemeClr val="accent1"/>
+          </a:effectRef>
+          <a:fontRef idx="minor">
+            <a:schemeClr val="lt1"/>
+          </a:fontRef>
+        </p:style>
+        <p:txBody>
+          <a:bodyPr rtlCol="0" anchor="ctr"/>
+          <a:lstStyle/>
+          <a:p>
+            <a:pPr algn="ctr"/>
+          </a:p>
+        </p:txBody>
+      </p:sp>
+      <p:sp>
+        <p:nvSpPr>
+          <p:cNvPr id="3" name="TextBox 2"/>
           <p:cNvSpPr txBox="1"/>
           <p:nvPr/>
         </p:nvSpPr>
         <p:spPr>
           <a:xfrm>
-            <a:off x="594360" y="658368"/>
-            <a:ext cx="2194560" cy="274320"/>
+            <a:off x="594360" y="676656"/>
+            <a:ext cx="10972800" cy="566928"/>
           </a:xfrm>
           <a:prstGeom prst="rect">
             <a:avLst/>
@@ -5259,29 +5213,29 @@
           </a:bodyPr>
           <a:lstStyle/>
           <a:p>
-            <a:pPr algn="ctr"/>
+            <a:pPr algn="l"/>
             <a:r>
-              <a:rPr sz="1100" b="1">
+              <a:rPr sz="3300" b="1">
                 <a:solidFill>
                   <a:srgbClr val="000000"/>
                 </a:solidFill>
                 <a:latin typeface="Arial"/>
               </a:rPr>
-              <a:t>ALSO ISSUED TODAY</a:t>
+              <a:t>NOW — FIELD TO DRAWING</a:t>
             </a:r>
           </a:p>
         </p:txBody>
       </p:sp>
       <p:sp>
         <p:nvSpPr>
-          <p:cNvPr id="5" name="TextBox 4"/>
+          <p:cNvPr id="4" name="TextBox 3"/>
           <p:cNvSpPr txBox="1"/>
           <p:nvPr/>
         </p:nvSpPr>
         <p:spPr>
           <a:xfrm>
-            <a:off x="594360" y="1152144"/>
-            <a:ext cx="10972800" cy="566928"/>
+            <a:off x="594360" y="1691640"/>
+            <a:ext cx="10515600" cy="365760"/>
           </a:xfrm>
           <a:prstGeom prst="rect">
             <a:avLst/>
@@ -5296,59 +5250,103 @@
           <a:p>
             <a:pPr algn="l"/>
             <a:r>
-              <a:rPr sz="3200" b="1">
+              <a:rPr sz="1600">
                 <a:solidFill>
-                  <a:srgbClr val="FFFDF7"/>
+                  <a:srgbClr val="000000"/>
                 </a:solidFill>
-                <a:latin typeface="Arial"/>
+                <a:latin typeface="Calibri"/>
               </a:rPr>
-              <a:t>P3d — ATTRACTOR: SITE ANALYSIS WITH MIXTLI</a:t>
+              <a:t>Rest of the class: build the field, translate it, export it, start the sheet.</a:t>
             </a:r>
           </a:p>
         </p:txBody>
       </p:sp>
       <p:sp>
         <p:nvSpPr>
+          <p:cNvPr id="5" name="Rectangle 4"/>
+          <p:cNvSpPr/>
+          <p:nvPr/>
+        </p:nvSpPr>
+        <p:spPr>
+          <a:xfrm>
+            <a:off x="662940" y="2354580"/>
+            <a:ext cx="621792" cy="566928"/>
+          </a:xfrm>
+          <a:prstGeom prst="rect">
+            <a:avLst/>
+          </a:prstGeom>
+          <a:solidFill>
+            <a:srgbClr val="000000"/>
+          </a:solidFill>
+          <a:ln w="6350">
+            <a:solidFill>
+              <a:srgbClr val="000000"/>
+            </a:solidFill>
+          </a:ln>
+          <a:effectLst/>
+        </p:spPr>
+        <p:style>
+          <a:lnRef idx="1">
+            <a:schemeClr val="accent1"/>
+          </a:lnRef>
+          <a:fillRef idx="3">
+            <a:schemeClr val="accent1"/>
+          </a:fillRef>
+          <a:effectRef idx="2">
+            <a:schemeClr val="accent1"/>
+          </a:effectRef>
+          <a:fontRef idx="minor">
+            <a:schemeClr val="lt1"/>
+          </a:fontRef>
+        </p:style>
+        <p:txBody>
+          <a:bodyPr rtlCol="0" anchor="ctr"/>
+          <a:lstStyle/>
+          <a:p/>
+        </p:txBody>
+      </p:sp>
+      <p:sp>
+        <p:nvSpPr>
           <p:cNvPr id="6" name="Rectangle 5"/>
           <p:cNvSpPr/>
           <p:nvPr/>
         </p:nvSpPr>
         <p:spPr>
           <a:xfrm>
-            <a:off x="594360" y="1810512"/>
-            <a:ext cx="10972800" cy="0"/>
+            <a:off x="594360" y="2286000"/>
+            <a:ext cx="621792" cy="566928"/>
           </a:xfrm>
           <a:prstGeom prst="rect">
             <a:avLst/>
           </a:prstGeom>
-          <a:noFill/>
-          <a:ln w="50800">
-            <a:solidFill>
-              <a:srgbClr val="FFFDF7"/>
-            </a:solidFill>
-          </a:ln>
-          <a:effectLst/>
-        </p:spPr>
-        <p:style>
-          <a:lnRef idx="1">
-            <a:schemeClr val="accent1"/>
-          </a:lnRef>
-          <a:fillRef idx="3">
-            <a:schemeClr val="accent1"/>
-          </a:fillRef>
-          <a:effectRef idx="2">
-            <a:schemeClr val="accent1"/>
-          </a:effectRef>
-          <a:fontRef idx="minor">
-            <a:schemeClr val="lt1"/>
-          </a:fontRef>
-        </p:style>
-        <p:txBody>
-          <a:bodyPr rtlCol="0" anchor="ctr"/>
-          <a:lstStyle/>
-          <a:p>
-            <a:pPr algn="ctr"/>
-          </a:p>
+          <a:solidFill>
+            <a:srgbClr val="FFFDF7"/>
+          </a:solidFill>
+          <a:ln w="34925">
+            <a:solidFill>
+              <a:srgbClr val="000000"/>
+            </a:solidFill>
+          </a:ln>
+          <a:effectLst/>
+        </p:spPr>
+        <p:style>
+          <a:lnRef idx="1">
+            <a:schemeClr val="accent1"/>
+          </a:lnRef>
+          <a:fillRef idx="3">
+            <a:schemeClr val="accent1"/>
+          </a:fillRef>
+          <a:effectRef idx="2">
+            <a:schemeClr val="accent1"/>
+          </a:effectRef>
+          <a:fontRef idx="minor">
+            <a:schemeClr val="lt1"/>
+          </a:fontRef>
+        </p:style>
+        <p:txBody>
+          <a:bodyPr rtlCol="0" anchor="ctr"/>
+          <a:lstStyle/>
+          <a:p/>
         </p:txBody>
       </p:sp>
       <p:sp>
@@ -5359,8 +5357,8 @@
         </p:nvSpPr>
         <p:spPr>
           <a:xfrm>
-            <a:off x="594360" y="1929384"/>
-            <a:ext cx="10972800" cy="329184"/>
+            <a:off x="594360" y="2468880"/>
+            <a:ext cx="621792" cy="274320"/>
           </a:xfrm>
           <a:prstGeom prst="rect">
             <a:avLst/>
@@ -5373,240 +5371,201 @@
           </a:bodyPr>
           <a:lstStyle/>
           <a:p>
-            <a:pPr algn="l"/>
-            <a:r>
-              <a:rPr sz="1300" b="1">
-                <a:solidFill>
-                  <a:srgbClr val="FFE500"/>
-                </a:solidFill>
-                <a:latin typeface="Arial"/>
-              </a:rPr>
-              <a:t>DUE WEEK 10 — Oct 27   /   7%</a:t>
-            </a:r>
-          </a:p>
-        </p:txBody>
-      </p:sp>
-      <p:sp>
-        <p:nvSpPr>
-          <p:cNvPr id="8" name="TextBox 7"/>
-          <p:cNvSpPr txBox="1"/>
-          <p:nvPr/>
-        </p:nvSpPr>
-        <p:spPr>
-          <a:xfrm>
-            <a:off x="594360" y="2377440"/>
-            <a:ext cx="10607040" cy="914400"/>
-          </a:xfrm>
-          <a:prstGeom prst="rect">
-            <a:avLst/>
-          </a:prstGeom>
-          <a:noFill/>
-        </p:spPr>
-        <p:txBody>
-          <a:bodyPr wrap="square" lIns="0" rIns="0" tIns="0" bIns="0" anchor="t">
-            <a:spAutoFit/>
-          </a:bodyPr>
-          <a:lstStyle/>
-          <a:p>
-            <a:pPr algn="l">
-              <a:lnSpc>
-                <a:spcPct val="130000"/>
-              </a:lnSpc>
-            </a:pPr>
-            <a:r>
-              <a:rPr sz="1500">
-                <a:solidFill>
-                  <a:srgbClr val="FFFDF7"/>
-                </a:solidFill>
-                <a:latin typeface="Calibri"/>
-              </a:rPr>
-              <a:t>Pick a real site and analyze it with Mixtli, the Blender add-on the instructor provides. Read its output as a field — the same distance-and-remap logic as P3c — and use it to make one spatial decision. Mixtli is taught in detail next class.</a:t>
-            </a:r>
-          </a:p>
-        </p:txBody>
-      </p:sp>
-      <p:sp>
-        <p:nvSpPr>
-          <p:cNvPr id="9" name="Rectangle 8"/>
-          <p:cNvSpPr/>
-          <p:nvPr/>
-        </p:nvSpPr>
-        <p:spPr>
-          <a:xfrm>
-            <a:off x="662940" y="3680460"/>
-            <a:ext cx="3517391" cy="411480"/>
-          </a:xfrm>
-          <a:prstGeom prst="rect">
-            <a:avLst/>
-          </a:prstGeom>
-          <a:solidFill>
-            <a:srgbClr val="000000"/>
-          </a:solidFill>
-          <a:ln w="6350">
-            <a:solidFill>
-              <a:srgbClr val="000000"/>
-            </a:solidFill>
-          </a:ln>
-          <a:effectLst/>
-        </p:spPr>
-        <p:style>
-          <a:lnRef idx="1">
-            <a:schemeClr val="accent1"/>
-          </a:lnRef>
-          <a:fillRef idx="3">
-            <a:schemeClr val="accent1"/>
-          </a:fillRef>
-          <a:effectRef idx="2">
-            <a:schemeClr val="accent1"/>
-          </a:effectRef>
-          <a:fontRef idx="minor">
-            <a:schemeClr val="lt1"/>
-          </a:fontRef>
-        </p:style>
-        <p:txBody>
-          <a:bodyPr rtlCol="0" anchor="ctr"/>
-          <a:lstStyle/>
-          <a:p/>
-        </p:txBody>
-      </p:sp>
-      <p:sp>
-        <p:nvSpPr>
-          <p:cNvPr id="10" name="Rectangle 9"/>
-          <p:cNvSpPr/>
-          <p:nvPr/>
-        </p:nvSpPr>
-        <p:spPr>
-          <a:xfrm>
-            <a:off x="594360" y="3611880"/>
-            <a:ext cx="3517391" cy="411480"/>
-          </a:xfrm>
-          <a:prstGeom prst="rect">
-            <a:avLst/>
-          </a:prstGeom>
-          <a:solidFill>
-            <a:srgbClr val="00D9E1"/>
-          </a:solidFill>
-          <a:ln w="34925">
-            <a:solidFill>
-              <a:srgbClr val="000000"/>
-            </a:solidFill>
-          </a:ln>
-          <a:effectLst/>
-        </p:spPr>
-        <p:style>
-          <a:lnRef idx="1">
-            <a:schemeClr val="accent1"/>
-          </a:lnRef>
-          <a:fillRef idx="3">
-            <a:schemeClr val="accent1"/>
-          </a:fillRef>
-          <a:effectRef idx="2">
-            <a:schemeClr val="accent1"/>
-          </a:effectRef>
-          <a:fontRef idx="minor">
-            <a:schemeClr val="lt1"/>
-          </a:fontRef>
-        </p:style>
-        <p:txBody>
-          <a:bodyPr rtlCol="0" anchor="ctr"/>
-          <a:lstStyle/>
-          <a:p/>
-        </p:txBody>
-      </p:sp>
-      <p:sp>
-        <p:nvSpPr>
-          <p:cNvPr id="11" name="TextBox 10"/>
-          <p:cNvSpPr txBox="1"/>
-          <p:nvPr/>
-        </p:nvSpPr>
-        <p:spPr>
-          <a:xfrm>
-            <a:off x="594360" y="3717036"/>
-            <a:ext cx="3517391" cy="274320"/>
-          </a:xfrm>
-          <a:prstGeom prst="rect">
-            <a:avLst/>
-          </a:prstGeom>
-          <a:noFill/>
-        </p:spPr>
-        <p:txBody>
-          <a:bodyPr wrap="square" lIns="0" rIns="0" tIns="0" bIns="0" anchor="t">
-            <a:spAutoFit/>
-          </a:bodyPr>
-          <a:lstStyle/>
-          <a:p>
             <a:pPr algn="ctr"/>
             <a:r>
-              <a:rPr sz="1100" b="1">
+              <a:rPr sz="1700" b="1">
                 <a:solidFill>
                   <a:srgbClr val="000000"/>
                 </a:solidFill>
                 <a:latin typeface="Arial"/>
               </a:rPr>
-              <a:t>SITE</a:t>
+              <a:t>✓</a:t>
             </a:r>
           </a:p>
         </p:txBody>
       </p:sp>
       <p:sp>
         <p:nvSpPr>
+          <p:cNvPr id="8" name="Rectangle 7"/>
+          <p:cNvSpPr/>
+          <p:nvPr/>
+        </p:nvSpPr>
+        <p:spPr>
+          <a:xfrm>
+            <a:off x="1559051" y="2354580"/>
+            <a:ext cx="10076688" cy="566928"/>
+          </a:xfrm>
+          <a:prstGeom prst="rect">
+            <a:avLst/>
+          </a:prstGeom>
+          <a:solidFill>
+            <a:srgbClr val="000000"/>
+          </a:solidFill>
+          <a:ln w="6350">
+            <a:solidFill>
+              <a:srgbClr val="000000"/>
+            </a:solidFill>
+          </a:ln>
+          <a:effectLst/>
+        </p:spPr>
+        <p:style>
+          <a:lnRef idx="1">
+            <a:schemeClr val="accent1"/>
+          </a:lnRef>
+          <a:fillRef idx="3">
+            <a:schemeClr val="accent1"/>
+          </a:fillRef>
+          <a:effectRef idx="2">
+            <a:schemeClr val="accent1"/>
+          </a:effectRef>
+          <a:fontRef idx="minor">
+            <a:schemeClr val="lt1"/>
+          </a:fontRef>
+        </p:style>
+        <p:txBody>
+          <a:bodyPr rtlCol="0" anchor="ctr"/>
+          <a:lstStyle/>
+          <a:p/>
+        </p:txBody>
+      </p:sp>
+      <p:sp>
+        <p:nvSpPr>
+          <p:cNvPr id="9" name="Rectangle 8"/>
+          <p:cNvSpPr/>
+          <p:nvPr/>
+        </p:nvSpPr>
+        <p:spPr>
+          <a:xfrm>
+            <a:off x="1490472" y="2286000"/>
+            <a:ext cx="10076688" cy="566928"/>
+          </a:xfrm>
+          <a:prstGeom prst="rect">
+            <a:avLst/>
+          </a:prstGeom>
+          <a:solidFill>
+            <a:srgbClr val="FFFDF7"/>
+          </a:solidFill>
+          <a:ln w="34925">
+            <a:solidFill>
+              <a:srgbClr val="000000"/>
+            </a:solidFill>
+          </a:ln>
+          <a:effectLst/>
+        </p:spPr>
+        <p:style>
+          <a:lnRef idx="1">
+            <a:schemeClr val="accent1"/>
+          </a:lnRef>
+          <a:fillRef idx="3">
+            <a:schemeClr val="accent1"/>
+          </a:fillRef>
+          <a:effectRef idx="2">
+            <a:schemeClr val="accent1"/>
+          </a:effectRef>
+          <a:fontRef idx="minor">
+            <a:schemeClr val="lt1"/>
+          </a:fontRef>
+        </p:style>
+        <p:txBody>
+          <a:bodyPr rtlCol="0" anchor="ctr"/>
+          <a:lstStyle/>
+          <a:p/>
+        </p:txBody>
+      </p:sp>
+      <p:sp>
+        <p:nvSpPr>
+          <p:cNvPr id="10" name="TextBox 9"/>
+          <p:cNvSpPr txBox="1"/>
+          <p:nvPr/>
+        </p:nvSpPr>
+        <p:spPr>
+          <a:xfrm>
+            <a:off x="1764792" y="2286000"/>
+            <a:ext cx="9528048" cy="566928"/>
+          </a:xfrm>
+          <a:prstGeom prst="rect">
+            <a:avLst/>
+          </a:prstGeom>
+          <a:noFill/>
+        </p:spPr>
+        <p:txBody>
+          <a:bodyPr wrap="square" lIns="0" rIns="0" tIns="0" bIns="0" anchor="ctr">
+            <a:spAutoFit/>
+          </a:bodyPr>
+          <a:lstStyle/>
+          <a:p>
+            <a:pPr algn="l"/>
+            <a:r>
+              <a:rPr sz="1450">
+                <a:solidFill>
+                  <a:srgbClr val="000000"/>
+                </a:solidFill>
+                <a:latin typeface="Calibri"/>
+              </a:rPr>
+              <a:t>Build the 2D field: a flat grid, distance at every sample, shown as grey with a legend</a:t>
+            </a:r>
+          </a:p>
+        </p:txBody>
+      </p:sp>
+      <p:sp>
+        <p:nvSpPr>
+          <p:cNvPr id="11" name="Rectangle 10"/>
+          <p:cNvSpPr/>
+          <p:nvPr/>
+        </p:nvSpPr>
+        <p:spPr>
+          <a:xfrm>
+            <a:off x="662940" y="3067812"/>
+            <a:ext cx="621792" cy="566928"/>
+          </a:xfrm>
+          <a:prstGeom prst="rect">
+            <a:avLst/>
+          </a:prstGeom>
+          <a:solidFill>
+            <a:srgbClr val="000000"/>
+          </a:solidFill>
+          <a:ln w="6350">
+            <a:solidFill>
+              <a:srgbClr val="000000"/>
+            </a:solidFill>
+          </a:ln>
+          <a:effectLst/>
+        </p:spPr>
+        <p:style>
+          <a:lnRef idx="1">
+            <a:schemeClr val="accent1"/>
+          </a:lnRef>
+          <a:fillRef idx="3">
+            <a:schemeClr val="accent1"/>
+          </a:fillRef>
+          <a:effectRef idx="2">
+            <a:schemeClr val="accent1"/>
+          </a:effectRef>
+          <a:fontRef idx="minor">
+            <a:schemeClr val="lt1"/>
+          </a:fontRef>
+        </p:style>
+        <p:txBody>
+          <a:bodyPr rtlCol="0" anchor="ctr"/>
+          <a:lstStyle/>
+          <a:p/>
+        </p:txBody>
+      </p:sp>
+      <p:sp>
+        <p:nvSpPr>
           <p:cNvPr id="12" name="Rectangle 11"/>
           <p:cNvSpPr/>
           <p:nvPr/>
         </p:nvSpPr>
         <p:spPr>
           <a:xfrm>
-            <a:off x="662940" y="4183380"/>
-            <a:ext cx="3517391" cy="1463040"/>
+            <a:off x="594360" y="2999232"/>
+            <a:ext cx="621792" cy="566928"/>
           </a:xfrm>
           <a:prstGeom prst="rect">
             <a:avLst/>
           </a:prstGeom>
           <a:solidFill>
-            <a:srgbClr val="000000"/>
-          </a:solidFill>
-          <a:ln w="6350">
-            <a:solidFill>
-              <a:srgbClr val="000000"/>
-            </a:solidFill>
-          </a:ln>
-          <a:effectLst/>
-        </p:spPr>
-        <p:style>
-          <a:lnRef idx="1">
-            <a:schemeClr val="accent1"/>
-          </a:lnRef>
-          <a:fillRef idx="3">
-            <a:schemeClr val="accent1"/>
-          </a:fillRef>
-          <a:effectRef idx="2">
-            <a:schemeClr val="accent1"/>
-          </a:effectRef>
-          <a:fontRef idx="minor">
-            <a:schemeClr val="lt1"/>
-          </a:fontRef>
-        </p:style>
-        <p:txBody>
-          <a:bodyPr rtlCol="0" anchor="ctr"/>
-          <a:lstStyle/>
-          <a:p/>
-        </p:txBody>
-      </p:sp>
-      <p:sp>
-        <p:nvSpPr>
-          <p:cNvPr id="13" name="Rectangle 12"/>
-          <p:cNvSpPr/>
-          <p:nvPr/>
-        </p:nvSpPr>
-        <p:spPr>
-          <a:xfrm>
-            <a:off x="594360" y="4114800"/>
-            <a:ext cx="3517391" cy="1463040"/>
-          </a:xfrm>
-          <a:prstGeom prst="rect">
-            <a:avLst/>
-          </a:prstGeom>
-          <a:solidFill>
             <a:srgbClr val="FFFDF7"/>
           </a:solidFill>
           <a:ln w="34925">
@@ -5638,14 +5597,14 @@
       </p:sp>
       <p:sp>
         <p:nvSpPr>
-          <p:cNvPr id="14" name="TextBox 13"/>
+          <p:cNvPr id="13" name="TextBox 12"/>
           <p:cNvSpPr txBox="1"/>
           <p:nvPr/>
         </p:nvSpPr>
         <p:spPr>
           <a:xfrm>
-            <a:off x="850392" y="4279392"/>
-            <a:ext cx="3005327" cy="320040"/>
+            <a:off x="594360" y="3182112"/>
+            <a:ext cx="621792" cy="274320"/>
           </a:xfrm>
           <a:prstGeom prst="rect">
             <a:avLst/>
@@ -5658,29 +5617,117 @@
           </a:bodyPr>
           <a:lstStyle/>
           <a:p>
-            <a:pPr algn="l"/>
+            <a:pPr algn="ctr"/>
             <a:r>
-              <a:rPr sz="1400" b="1">
+              <a:rPr sz="1700" b="1">
                 <a:solidFill>
                   <a:srgbClr val="000000"/>
                 </a:solidFill>
                 <a:latin typeface="Arial"/>
               </a:rPr>
-              <a:t>RECORD IT</a:t>
+              <a:t>✓</a:t>
             </a:r>
           </a:p>
         </p:txBody>
       </p:sp>
       <p:sp>
         <p:nvSpPr>
-          <p:cNvPr id="15" name="TextBox 14"/>
+          <p:cNvPr id="14" name="Rectangle 13"/>
+          <p:cNvSpPr/>
+          <p:nvPr/>
+        </p:nvSpPr>
+        <p:spPr>
+          <a:xfrm>
+            <a:off x="1559051" y="3067812"/>
+            <a:ext cx="10076688" cy="566928"/>
+          </a:xfrm>
+          <a:prstGeom prst="rect">
+            <a:avLst/>
+          </a:prstGeom>
+          <a:solidFill>
+            <a:srgbClr val="000000"/>
+          </a:solidFill>
+          <a:ln w="6350">
+            <a:solidFill>
+              <a:srgbClr val="000000"/>
+            </a:solidFill>
+          </a:ln>
+          <a:effectLst/>
+        </p:spPr>
+        <p:style>
+          <a:lnRef idx="1">
+            <a:schemeClr val="accent1"/>
+          </a:lnRef>
+          <a:fillRef idx="3">
+            <a:schemeClr val="accent1"/>
+          </a:fillRef>
+          <a:effectRef idx="2">
+            <a:schemeClr val="accent1"/>
+          </a:effectRef>
+          <a:fontRef idx="minor">
+            <a:schemeClr val="lt1"/>
+          </a:fontRef>
+        </p:style>
+        <p:txBody>
+          <a:bodyPr rtlCol="0" anchor="ctr"/>
+          <a:lstStyle/>
+          <a:p/>
+        </p:txBody>
+      </p:sp>
+      <p:sp>
+        <p:nvSpPr>
+          <p:cNvPr id="15" name="Rectangle 14"/>
+          <p:cNvSpPr/>
+          <p:nvPr/>
+        </p:nvSpPr>
+        <p:spPr>
+          <a:xfrm>
+            <a:off x="1490472" y="2999232"/>
+            <a:ext cx="10076688" cy="566928"/>
+          </a:xfrm>
+          <a:prstGeom prst="rect">
+            <a:avLst/>
+          </a:prstGeom>
+          <a:solidFill>
+            <a:srgbClr val="FFFDF7"/>
+          </a:solidFill>
+          <a:ln w="34925">
+            <a:solidFill>
+              <a:srgbClr val="000000"/>
+            </a:solidFill>
+          </a:ln>
+          <a:effectLst/>
+        </p:spPr>
+        <p:style>
+          <a:lnRef idx="1">
+            <a:schemeClr val="accent1"/>
+          </a:lnRef>
+          <a:fillRef idx="3">
+            <a:schemeClr val="accent1"/>
+          </a:fillRef>
+          <a:effectRef idx="2">
+            <a:schemeClr val="accent1"/>
+          </a:effectRef>
+          <a:fontRef idx="minor">
+            <a:schemeClr val="lt1"/>
+          </a:fontRef>
+        </p:style>
+        <p:txBody>
+          <a:bodyPr rtlCol="0" anchor="ctr"/>
+          <a:lstStyle/>
+          <a:p/>
+        </p:txBody>
+      </p:sp>
+      <p:sp>
+        <p:nvSpPr>
+          <p:cNvPr id="16" name="TextBox 15"/>
           <p:cNvSpPr txBox="1"/>
           <p:nvPr/>
         </p:nvSpPr>
         <p:spPr>
           <a:xfrm>
-            <a:off x="850392" y="4663440"/>
-            <a:ext cx="3005327" cy="822960"/>
+            <a:off x="1764792" y="2999232"/>
+            <a:ext cx="9528048" cy="566928"/>
           </a:xfrm>
           <a:prstGeom prst="rect">
             <a:avLst/>
@@ -5688,38 +5735,34 @@
           <a:noFill/>
         </p:spPr>
         <p:txBody>
-          <a:bodyPr wrap="square" lIns="0" rIns="0" tIns="0" bIns="0" anchor="t">
+          <a:bodyPr wrap="square" lIns="0" rIns="0" tIns="0" bIns="0" anchor="ctr">
             <a:spAutoFit/>
           </a:bodyPr>
           <a:lstStyle/>
           <a:p>
-            <a:pPr algn="l">
-              <a:lnSpc>
-                <a:spcPct val="125000"/>
-              </a:lnSpc>
-            </a:pPr>
+            <a:pPr algn="l"/>
             <a:r>
-              <a:rPr sz="1250">
+              <a:rPr sz="1450">
                 <a:solidFill>
                   <a:srgbClr val="000000"/>
                 </a:solidFill>
                 <a:latin typeface="Calibri"/>
               </a:rPr>
-              <a:t>Source, units, scale and orientation, before any analysis.</a:t>
+              <a:t>Write down input and output ranges, clamp and falloff — actual numbers</a:t>
             </a:r>
           </a:p>
         </p:txBody>
       </p:sp>
       <p:sp>
         <p:nvSpPr>
-          <p:cNvPr id="16" name="Rectangle 15"/>
-          <p:cNvSpPr/>
-          <p:nvPr/>
-        </p:nvSpPr>
-        <p:spPr>
-          <a:xfrm>
-            <a:off x="4390644" y="3680460"/>
-            <a:ext cx="3517391" cy="411480"/>
+          <p:cNvPr id="17" name="Rectangle 16"/>
+          <p:cNvSpPr/>
+          <p:nvPr/>
+        </p:nvSpPr>
+        <p:spPr>
+          <a:xfrm>
+            <a:off x="662940" y="3781044"/>
+            <a:ext cx="621792" cy="566928"/>
           </a:xfrm>
           <a:prstGeom prst="rect">
             <a:avLst/>
@@ -5756,20 +5799,20 @@
       </p:sp>
       <p:sp>
         <p:nvSpPr>
-          <p:cNvPr id="17" name="Rectangle 16"/>
-          <p:cNvSpPr/>
-          <p:nvPr/>
-        </p:nvSpPr>
-        <p:spPr>
-          <a:xfrm>
-            <a:off x="4322064" y="3611880"/>
-            <a:ext cx="3517391" cy="411480"/>
+          <p:cNvPr id="18" name="Rectangle 17"/>
+          <p:cNvSpPr/>
+          <p:nvPr/>
+        </p:nvSpPr>
+        <p:spPr>
+          <a:xfrm>
+            <a:off x="594360" y="3712464"/>
+            <a:ext cx="621792" cy="566928"/>
           </a:xfrm>
           <a:prstGeom prst="rect">
             <a:avLst/>
           </a:prstGeom>
           <a:solidFill>
-            <a:srgbClr val="C6F035"/>
+            <a:srgbClr val="FFFDF7"/>
           </a:solidFill>
           <a:ln w="34925">
             <a:solidFill>
@@ -5800,14 +5843,14 @@
       </p:sp>
       <p:sp>
         <p:nvSpPr>
-          <p:cNvPr id="18" name="TextBox 17"/>
+          <p:cNvPr id="19" name="TextBox 18"/>
           <p:cNvSpPr txBox="1"/>
           <p:nvPr/>
         </p:nvSpPr>
         <p:spPr>
           <a:xfrm>
-            <a:off x="4322064" y="3717036"/>
-            <a:ext cx="3517391" cy="274320"/>
+            <a:off x="594360" y="3895344"/>
+            <a:ext cx="621792" cy="274320"/>
           </a:xfrm>
           <a:prstGeom prst="rect">
             <a:avLst/>
@@ -5822,27 +5865,27 @@
           <a:p>
             <a:pPr algn="ctr"/>
             <a:r>
-              <a:rPr sz="1100" b="1">
+              <a:rPr sz="1700" b="1">
                 <a:solidFill>
                   <a:srgbClr val="000000"/>
                 </a:solidFill>
                 <a:latin typeface="Arial"/>
               </a:rPr>
-              <a:t>ANALYZE</a:t>
+              <a:t>✓</a:t>
             </a:r>
           </a:p>
         </p:txBody>
       </p:sp>
       <p:sp>
         <p:nvSpPr>
-          <p:cNvPr id="19" name="Rectangle 18"/>
-          <p:cNvSpPr/>
-          <p:nvPr/>
-        </p:nvSpPr>
-        <p:spPr>
-          <a:xfrm>
-            <a:off x="4390644" y="4183380"/>
-            <a:ext cx="3517391" cy="1463040"/>
+          <p:cNvPr id="20" name="Rectangle 19"/>
+          <p:cNvSpPr/>
+          <p:nvPr/>
+        </p:nvSpPr>
+        <p:spPr>
+          <a:xfrm>
+            <a:off x="1559051" y="3781044"/>
+            <a:ext cx="10076688" cy="566928"/>
           </a:xfrm>
           <a:prstGeom prst="rect">
             <a:avLst/>
@@ -5879,14 +5922,14 @@
       </p:sp>
       <p:sp>
         <p:nvSpPr>
-          <p:cNvPr id="20" name="Rectangle 19"/>
-          <p:cNvSpPr/>
-          <p:nvPr/>
-        </p:nvSpPr>
-        <p:spPr>
-          <a:xfrm>
-            <a:off x="4322064" y="4114800"/>
-            <a:ext cx="3517391" cy="1463040"/>
+          <p:cNvPr id="21" name="Rectangle 20"/>
+          <p:cNvSpPr/>
+          <p:nvPr/>
+        </p:nvSpPr>
+        <p:spPr>
+          <a:xfrm>
+            <a:off x="1490472" y="3712464"/>
+            <a:ext cx="10076688" cy="566928"/>
           </a:xfrm>
           <a:prstGeom prst="rect">
             <a:avLst/>
@@ -5923,14 +5966,137 @@
       </p:sp>
       <p:sp>
         <p:nvSpPr>
-          <p:cNvPr id="21" name="TextBox 20"/>
+          <p:cNvPr id="22" name="TextBox 21"/>
           <p:cNvSpPr txBox="1"/>
           <p:nvPr/>
         </p:nvSpPr>
         <p:spPr>
           <a:xfrm>
-            <a:off x="4578096" y="4279392"/>
-            <a:ext cx="3005327" cy="320040"/>
+            <a:off x="1764792" y="3712464"/>
+            <a:ext cx="9528048" cy="566928"/>
+          </a:xfrm>
+          <a:prstGeom prst="rect">
+            <a:avLst/>
+          </a:prstGeom>
+          <a:noFill/>
+        </p:spPr>
+        <p:txBody>
+          <a:bodyPr wrap="square" lIns="0" rIns="0" tIns="0" bIns="0" anchor="ctr">
+            <a:spAutoFit/>
+          </a:bodyPr>
+          <a:lstStyle/>
+          <a:p>
+            <a:pPr algn="l"/>
+            <a:r>
+              <a:rPr sz="1450">
+                <a:solidFill>
+                  <a:srgbClr val="000000"/>
+                </a:solidFill>
+                <a:latin typeface="Calibri"/>
+              </a:rPr>
+              <a:t>Translate the field into lines: length, rotation, spacing or hatch density</a:t>
+            </a:r>
+          </a:p>
+        </p:txBody>
+      </p:sp>
+      <p:sp>
+        <p:nvSpPr>
+          <p:cNvPr id="23" name="Rectangle 22"/>
+          <p:cNvSpPr/>
+          <p:nvPr/>
+        </p:nvSpPr>
+        <p:spPr>
+          <a:xfrm>
+            <a:off x="662940" y="4494276"/>
+            <a:ext cx="621792" cy="566928"/>
+          </a:xfrm>
+          <a:prstGeom prst="rect">
+            <a:avLst/>
+          </a:prstGeom>
+          <a:solidFill>
+            <a:srgbClr val="000000"/>
+          </a:solidFill>
+          <a:ln w="6350">
+            <a:solidFill>
+              <a:srgbClr val="000000"/>
+            </a:solidFill>
+          </a:ln>
+          <a:effectLst/>
+        </p:spPr>
+        <p:style>
+          <a:lnRef idx="1">
+            <a:schemeClr val="accent1"/>
+          </a:lnRef>
+          <a:fillRef idx="3">
+            <a:schemeClr val="accent1"/>
+          </a:fillRef>
+          <a:effectRef idx="2">
+            <a:schemeClr val="accent1"/>
+          </a:effectRef>
+          <a:fontRef idx="minor">
+            <a:schemeClr val="lt1"/>
+          </a:fontRef>
+        </p:style>
+        <p:txBody>
+          <a:bodyPr rtlCol="0" anchor="ctr"/>
+          <a:lstStyle/>
+          <a:p/>
+        </p:txBody>
+      </p:sp>
+      <p:sp>
+        <p:nvSpPr>
+          <p:cNvPr id="24" name="Rectangle 23"/>
+          <p:cNvSpPr/>
+          <p:nvPr/>
+        </p:nvSpPr>
+        <p:spPr>
+          <a:xfrm>
+            <a:off x="594360" y="4425696"/>
+            <a:ext cx="621792" cy="566928"/>
+          </a:xfrm>
+          <a:prstGeom prst="rect">
+            <a:avLst/>
+          </a:prstGeom>
+          <a:solidFill>
+            <a:srgbClr val="FFFDF7"/>
+          </a:solidFill>
+          <a:ln w="34925">
+            <a:solidFill>
+              <a:srgbClr val="000000"/>
+            </a:solidFill>
+          </a:ln>
+          <a:effectLst/>
+        </p:spPr>
+        <p:style>
+          <a:lnRef idx="1">
+            <a:schemeClr val="accent1"/>
+          </a:lnRef>
+          <a:fillRef idx="3">
+            <a:schemeClr val="accent1"/>
+          </a:fillRef>
+          <a:effectRef idx="2">
+            <a:schemeClr val="accent1"/>
+          </a:effectRef>
+          <a:fontRef idx="minor">
+            <a:schemeClr val="lt1"/>
+          </a:fontRef>
+        </p:style>
+        <p:txBody>
+          <a:bodyPr rtlCol="0" anchor="ctr"/>
+          <a:lstStyle/>
+          <a:p/>
+        </p:txBody>
+      </p:sp>
+      <p:sp>
+        <p:nvSpPr>
+          <p:cNvPr id="25" name="TextBox 24"/>
+          <p:cNvSpPr txBox="1"/>
+          <p:nvPr/>
+        </p:nvSpPr>
+        <p:spPr>
+          <a:xfrm>
+            <a:off x="594360" y="4608576"/>
+            <a:ext cx="621792" cy="274320"/>
           </a:xfrm>
           <a:prstGeom prst="rect">
             <a:avLst/>
@@ -5943,29 +6109,117 @@
           </a:bodyPr>
           <a:lstStyle/>
           <a:p>
-            <a:pPr algn="l"/>
+            <a:pPr algn="ctr"/>
             <a:r>
-              <a:rPr sz="1400" b="1">
+              <a:rPr sz="1700" b="1">
                 <a:solidFill>
                   <a:srgbClr val="000000"/>
                 </a:solidFill>
                 <a:latin typeface="Arial"/>
               </a:rPr>
-              <a:t>ONE COMPARISON</a:t>
+              <a:t>✓</a:t>
             </a:r>
           </a:p>
         </p:txBody>
       </p:sp>
       <p:sp>
         <p:nvSpPr>
-          <p:cNvPr id="22" name="TextBox 21"/>
+          <p:cNvPr id="26" name="Rectangle 25"/>
+          <p:cNvSpPr/>
+          <p:nvPr/>
+        </p:nvSpPr>
+        <p:spPr>
+          <a:xfrm>
+            <a:off x="1559051" y="4494276"/>
+            <a:ext cx="10076688" cy="566928"/>
+          </a:xfrm>
+          <a:prstGeom prst="rect">
+            <a:avLst/>
+          </a:prstGeom>
+          <a:solidFill>
+            <a:srgbClr val="000000"/>
+          </a:solidFill>
+          <a:ln w="6350">
+            <a:solidFill>
+              <a:srgbClr val="000000"/>
+            </a:solidFill>
+          </a:ln>
+          <a:effectLst/>
+        </p:spPr>
+        <p:style>
+          <a:lnRef idx="1">
+            <a:schemeClr val="accent1"/>
+          </a:lnRef>
+          <a:fillRef idx="3">
+            <a:schemeClr val="accent1"/>
+          </a:fillRef>
+          <a:effectRef idx="2">
+            <a:schemeClr val="accent1"/>
+          </a:effectRef>
+          <a:fontRef idx="minor">
+            <a:schemeClr val="lt1"/>
+          </a:fontRef>
+        </p:style>
+        <p:txBody>
+          <a:bodyPr rtlCol="0" anchor="ctr"/>
+          <a:lstStyle/>
+          <a:p/>
+        </p:txBody>
+      </p:sp>
+      <p:sp>
+        <p:nvSpPr>
+          <p:cNvPr id="27" name="Rectangle 26"/>
+          <p:cNvSpPr/>
+          <p:nvPr/>
+        </p:nvSpPr>
+        <p:spPr>
+          <a:xfrm>
+            <a:off x="1490472" y="4425696"/>
+            <a:ext cx="10076688" cy="566928"/>
+          </a:xfrm>
+          <a:prstGeom prst="rect">
+            <a:avLst/>
+          </a:prstGeom>
+          <a:solidFill>
+            <a:srgbClr val="FFFDF7"/>
+          </a:solidFill>
+          <a:ln w="34925">
+            <a:solidFill>
+              <a:srgbClr val="000000"/>
+            </a:solidFill>
+          </a:ln>
+          <a:effectLst/>
+        </p:spPr>
+        <p:style>
+          <a:lnRef idx="1">
+            <a:schemeClr val="accent1"/>
+          </a:lnRef>
+          <a:fillRef idx="3">
+            <a:schemeClr val="accent1"/>
+          </a:fillRef>
+          <a:effectRef idx="2">
+            <a:schemeClr val="accent1"/>
+          </a:effectRef>
+          <a:fontRef idx="minor">
+            <a:schemeClr val="lt1"/>
+          </a:fontRef>
+        </p:style>
+        <p:txBody>
+          <a:bodyPr rtlCol="0" anchor="ctr"/>
+          <a:lstStyle/>
+          <a:p/>
+        </p:txBody>
+      </p:sp>
+      <p:sp>
+        <p:nvSpPr>
+          <p:cNvPr id="28" name="TextBox 27"/>
           <p:cNvSpPr txBox="1"/>
           <p:nvPr/>
         </p:nvSpPr>
         <p:spPr>
           <a:xfrm>
-            <a:off x="4578096" y="4663440"/>
-            <a:ext cx="3005327" cy="822960"/>
+            <a:off x="1764792" y="4425696"/>
+            <a:ext cx="9528048" cy="566928"/>
           </a:xfrm>
           <a:prstGeom prst="rect">
             <a:avLst/>
@@ -5973,38 +6227,34 @@
           <a:noFill/>
         </p:spPr>
         <p:txBody>
-          <a:bodyPr wrap="square" lIns="0" rIns="0" tIns="0" bIns="0" anchor="t">
+          <a:bodyPr wrap="square" lIns="0" rIns="0" tIns="0" bIns="0" anchor="ctr">
             <a:spAutoFit/>
           </a:bodyPr>
           <a:lstStyle/>
           <a:p>
-            <a:pPr algn="l">
-              <a:lnSpc>
-                <a:spcPct val="125000"/>
-              </a:lnSpc>
-            </a:pPr>
+            <a:pPr algn="l"/>
             <a:r>
-              <a:rPr sz="1250">
+              <a:rPr sz="1450">
                 <a:solidFill>
                   <a:srgbClr val="000000"/>
                 </a:solidFill>
                 <a:latin typeface="Calibri"/>
               </a:rPr>
-              <a:t>One analysis with a legend and units, and one comparison.</a:t>
+              <a:t>Export an SVG at sheet size and measure one known line</a:t>
             </a:r>
           </a:p>
         </p:txBody>
       </p:sp>
       <p:sp>
         <p:nvSpPr>
-          <p:cNvPr id="23" name="Rectangle 22"/>
-          <p:cNvSpPr/>
-          <p:nvPr/>
-        </p:nvSpPr>
-        <p:spPr>
-          <a:xfrm>
-            <a:off x="8118347" y="3680460"/>
-            <a:ext cx="3517391" cy="411480"/>
+          <p:cNvPr id="29" name="Rectangle 28"/>
+          <p:cNvSpPr/>
+          <p:nvPr/>
+        </p:nvSpPr>
+        <p:spPr>
+          <a:xfrm>
+            <a:off x="662940" y="5207508"/>
+            <a:ext cx="621792" cy="566928"/>
           </a:xfrm>
           <a:prstGeom prst="rect">
             <a:avLst/>
@@ -6041,20 +6291,20 @@
       </p:sp>
       <p:sp>
         <p:nvSpPr>
-          <p:cNvPr id="24" name="Rectangle 23"/>
-          <p:cNvSpPr/>
-          <p:nvPr/>
-        </p:nvSpPr>
-        <p:spPr>
-          <a:xfrm>
-            <a:off x="8049767" y="3611880"/>
-            <a:ext cx="3517391" cy="411480"/>
+          <p:cNvPr id="30" name="Rectangle 29"/>
+          <p:cNvSpPr/>
+          <p:nvPr/>
+        </p:nvSpPr>
+        <p:spPr>
+          <a:xfrm>
+            <a:off x="594360" y="5138928"/>
+            <a:ext cx="621792" cy="566928"/>
           </a:xfrm>
           <a:prstGeom prst="rect">
             <a:avLst/>
           </a:prstGeom>
           <a:solidFill>
-            <a:srgbClr val="FFE500"/>
+            <a:srgbClr val="FFFDF7"/>
           </a:solidFill>
           <a:ln w="34925">
             <a:solidFill>
@@ -6085,14 +6335,14 @@
       </p:sp>
       <p:sp>
         <p:nvSpPr>
-          <p:cNvPr id="25" name="TextBox 24"/>
+          <p:cNvPr id="31" name="TextBox 30"/>
           <p:cNvSpPr txBox="1"/>
           <p:nvPr/>
         </p:nvSpPr>
         <p:spPr>
           <a:xfrm>
-            <a:off x="8049767" y="3717036"/>
-            <a:ext cx="3517391" cy="274320"/>
+            <a:off x="594360" y="5321808"/>
+            <a:ext cx="621792" cy="274320"/>
           </a:xfrm>
           <a:prstGeom prst="rect">
             <a:avLst/>
@@ -6107,27 +6357,27 @@
           <a:p>
             <a:pPr algn="ctr"/>
             <a:r>
-              <a:rPr sz="1100" b="1">
+              <a:rPr sz="1700" b="1">
                 <a:solidFill>
                   <a:srgbClr val="000000"/>
                 </a:solidFill>
                 <a:latin typeface="Arial"/>
               </a:rPr>
-              <a:t>DECIDE</a:t>
+              <a:t>✓</a:t>
             </a:r>
           </a:p>
         </p:txBody>
       </p:sp>
       <p:sp>
         <p:nvSpPr>
-          <p:cNvPr id="26" name="Rectangle 25"/>
-          <p:cNvSpPr/>
-          <p:nvPr/>
-        </p:nvSpPr>
-        <p:spPr>
-          <a:xfrm>
-            <a:off x="8118347" y="4183380"/>
-            <a:ext cx="3517391" cy="1463040"/>
+          <p:cNvPr id="32" name="Rectangle 31"/>
+          <p:cNvSpPr/>
+          <p:nvPr/>
+        </p:nvSpPr>
+        <p:spPr>
+          <a:xfrm>
+            <a:off x="1559051" y="5207508"/>
+            <a:ext cx="10076688" cy="566928"/>
           </a:xfrm>
           <a:prstGeom prst="rect">
             <a:avLst/>
@@ -6164,14 +6414,14 @@
       </p:sp>
       <p:sp>
         <p:nvSpPr>
-          <p:cNvPr id="27" name="Rectangle 26"/>
-          <p:cNvSpPr/>
-          <p:nvPr/>
-        </p:nvSpPr>
-        <p:spPr>
-          <a:xfrm>
-            <a:off x="8049767" y="4114800"/>
-            <a:ext cx="3517391" cy="1463040"/>
+          <p:cNvPr id="33" name="Rectangle 32"/>
+          <p:cNvSpPr/>
+          <p:nvPr/>
+        </p:nvSpPr>
+        <p:spPr>
+          <a:xfrm>
+            <a:off x="1490472" y="5138928"/>
+            <a:ext cx="10076688" cy="566928"/>
           </a:xfrm>
           <a:prstGeom prst="rect">
             <a:avLst/>
@@ -6208,14 +6458,14 @@
       </p:sp>
       <p:sp>
         <p:nvSpPr>
-          <p:cNvPr id="28" name="TextBox 27"/>
+          <p:cNvPr id="34" name="TextBox 33"/>
           <p:cNvSpPr txBox="1"/>
           <p:nvPr/>
         </p:nvSpPr>
         <p:spPr>
           <a:xfrm>
-            <a:off x="8305799" y="4279392"/>
-            <a:ext cx="3005327" cy="320040"/>
+            <a:off x="1764792" y="5138928"/>
+            <a:ext cx="9528048" cy="566928"/>
           </a:xfrm>
           <a:prstGeom prst="rect">
             <a:avLst/>
@@ -6223,59 +6473,143 @@
           <a:noFill/>
         </p:spPr>
         <p:txBody>
-          <a:bodyPr wrap="square" lIns="0" rIns="0" tIns="0" bIns="0" anchor="t">
+          <a:bodyPr wrap="square" lIns="0" rIns="0" tIns="0" bIns="0" anchor="ctr">
             <a:spAutoFit/>
           </a:bodyPr>
           <a:lstStyle/>
           <a:p>
             <a:pPr algn="l"/>
             <a:r>
-              <a:rPr sz="1400" b="1">
-                <a:solidFill>
-                  <a:srgbClr val="000000"/>
-                </a:solidFill>
-                <a:latin typeface="Arial"/>
-              </a:rPr>
-              <a:t>YOUR READING</a:t>
-            </a:r>
-          </a:p>
-        </p:txBody>
-      </p:sp>
-      <p:sp>
-        <p:nvSpPr>
-          <p:cNvPr id="29" name="TextBox 28"/>
-          <p:cNvSpPr txBox="1"/>
-          <p:nvPr/>
-        </p:nvSpPr>
-        <p:spPr>
-          <a:xfrm>
-            <a:off x="8305799" y="4663440"/>
-            <a:ext cx="3005327" cy="822960"/>
-          </a:xfrm>
-          <a:prstGeom prst="rect">
-            <a:avLst/>
-          </a:prstGeom>
-          <a:noFill/>
-        </p:spPr>
-        <p:txBody>
-          <a:bodyPr wrap="square" lIns="0" rIns="0" tIns="0" bIns="0" anchor="t">
-            <a:spAutoFit/>
-          </a:bodyPr>
-          <a:lstStyle/>
-          <a:p>
-            <a:pPr algn="l">
-              <a:lnSpc>
-                <a:spcPct val="125000"/>
-              </a:lnSpc>
-            </a:pPr>
-            <a:r>
-              <a:rPr sz="1250">
+              <a:rPr sz="1450">
                 <a:solidFill>
                   <a:srgbClr val="000000"/>
                 </a:solidFill>
                 <a:latin typeface="Calibri"/>
               </a:rPr>
-              <a:t>The add-on computes. The question and the reading are yours.</a:t>
+              <a:t>Optional: run a small test plot on the pen plotter and compare it with the screen</a:t>
+            </a:r>
+          </a:p>
+        </p:txBody>
+      </p:sp>
+      <p:sp>
+        <p:nvSpPr>
+          <p:cNvPr id="35" name="Rectangle 34"/>
+          <p:cNvSpPr/>
+          <p:nvPr/>
+        </p:nvSpPr>
+        <p:spPr>
+          <a:xfrm>
+            <a:off x="662940" y="6012180"/>
+            <a:ext cx="8412480" cy="566928"/>
+          </a:xfrm>
+          <a:prstGeom prst="rect">
+            <a:avLst/>
+          </a:prstGeom>
+          <a:solidFill>
+            <a:srgbClr val="000000"/>
+          </a:solidFill>
+          <a:ln w="6350">
+            <a:solidFill>
+              <a:srgbClr val="000000"/>
+            </a:solidFill>
+          </a:ln>
+          <a:effectLst/>
+        </p:spPr>
+        <p:style>
+          <a:lnRef idx="1">
+            <a:schemeClr val="accent1"/>
+          </a:lnRef>
+          <a:fillRef idx="3">
+            <a:schemeClr val="accent1"/>
+          </a:fillRef>
+          <a:effectRef idx="2">
+            <a:schemeClr val="accent1"/>
+          </a:effectRef>
+          <a:fontRef idx="minor">
+            <a:schemeClr val="lt1"/>
+          </a:fontRef>
+        </p:style>
+        <p:txBody>
+          <a:bodyPr rtlCol="0" anchor="ctr"/>
+          <a:lstStyle/>
+          <a:p/>
+        </p:txBody>
+      </p:sp>
+      <p:sp>
+        <p:nvSpPr>
+          <p:cNvPr id="36" name="Rectangle 35"/>
+          <p:cNvSpPr/>
+          <p:nvPr/>
+        </p:nvSpPr>
+        <p:spPr>
+          <a:xfrm>
+            <a:off x="594360" y="5943600"/>
+            <a:ext cx="8412480" cy="566928"/>
+          </a:xfrm>
+          <a:prstGeom prst="rect">
+            <a:avLst/>
+          </a:prstGeom>
+          <a:solidFill>
+            <a:srgbClr val="000000"/>
+          </a:solidFill>
+          <a:ln w="34925">
+            <a:solidFill>
+              <a:srgbClr val="000000"/>
+            </a:solidFill>
+          </a:ln>
+          <a:effectLst/>
+        </p:spPr>
+        <p:style>
+          <a:lnRef idx="1">
+            <a:schemeClr val="accent1"/>
+          </a:lnRef>
+          <a:fillRef idx="3">
+            <a:schemeClr val="accent1"/>
+          </a:fillRef>
+          <a:effectRef idx="2">
+            <a:schemeClr val="accent1"/>
+          </a:effectRef>
+          <a:fontRef idx="minor">
+            <a:schemeClr val="lt1"/>
+          </a:fontRef>
+        </p:style>
+        <p:txBody>
+          <a:bodyPr rtlCol="0" anchor="ctr"/>
+          <a:lstStyle/>
+          <a:p/>
+        </p:txBody>
+      </p:sp>
+      <p:sp>
+        <p:nvSpPr>
+          <p:cNvPr id="37" name="TextBox 36"/>
+          <p:cNvSpPr txBox="1"/>
+          <p:nvPr/>
+        </p:nvSpPr>
+        <p:spPr>
+          <a:xfrm>
+            <a:off x="594360" y="5943600"/>
+            <a:ext cx="8412480" cy="566928"/>
+          </a:xfrm>
+          <a:prstGeom prst="rect">
+            <a:avLst/>
+          </a:prstGeom>
+          <a:noFill/>
+        </p:spPr>
+        <p:txBody>
+          <a:bodyPr wrap="square" lIns="0" rIns="0" tIns="0" bIns="0" anchor="ctr">
+            <a:spAutoFit/>
+          </a:bodyPr>
+          <a:lstStyle/>
+          <a:p>
+            <a:pPr algn="ctr"/>
+            <a:r>
+              <a:rPr sz="1300" b="1">
+                <a:solidFill>
+                  <a:srgbClr val="C6F035"/>
+                </a:solidFill>
+                <a:latin typeface="Arial"/>
+              </a:rPr>
+              <a:t>MOVE THE ATTRACTOR. IF YOU CANNOT PREDICT WHAT HAPPENS, STOP AND READ THE FIELD.</a:t>
             </a:r>
           </a:p>
         </p:txBody>
@@ -6380,3012 +6714,6 @@
                 </a:solidFill>
                 <a:latin typeface="Arial"/>
               </a:rPr>
-              <a:t>REQUIREMENTS — P3d</a:t>
-            </a:r>
-          </a:p>
-        </p:txBody>
-      </p:sp>
-      <p:sp>
-        <p:nvSpPr>
-          <p:cNvPr id="4" name="TextBox 3"/>
-          <p:cNvSpPr txBox="1"/>
-          <p:nvPr/>
-        </p:nvSpPr>
-        <p:spPr>
-          <a:xfrm>
-            <a:off x="594360" y="1261872"/>
-            <a:ext cx="10972800" cy="310896"/>
-          </a:xfrm>
-          <a:prstGeom prst="rect">
-            <a:avLst/>
-          </a:prstGeom>
-          <a:noFill/>
-        </p:spPr>
-        <p:txBody>
-          <a:bodyPr wrap="square" lIns="0" rIns="0" tIns="0" bIns="0" anchor="t">
-            <a:spAutoFit/>
-          </a:bodyPr>
-          <a:lstStyle/>
-          <a:p>
-            <a:pPr algn="l"/>
-            <a:r>
-              <a:rPr sz="1350">
-                <a:solidFill>
-                  <a:srgbClr val="6B6B6B"/>
-                </a:solidFill>
-                <a:latin typeface="Calibri"/>
-              </a:rPr>
-              <a:t>Visual quality 35% · computational understanding 25% · technical execution 20% · experimentation 10% · requirements and identity 10%.</a:t>
-            </a:r>
-          </a:p>
-        </p:txBody>
-      </p:sp>
-      <p:sp>
-        <p:nvSpPr>
-          <p:cNvPr id="5" name="Rectangle 4"/>
-          <p:cNvSpPr/>
-          <p:nvPr/>
-        </p:nvSpPr>
-        <p:spPr>
-          <a:xfrm>
-            <a:off x="662940" y="1851660"/>
-            <a:ext cx="777240" cy="724204"/>
-          </a:xfrm>
-          <a:prstGeom prst="rect">
-            <a:avLst/>
-          </a:prstGeom>
-          <a:solidFill>
-            <a:srgbClr val="000000"/>
-          </a:solidFill>
-          <a:ln w="6350">
-            <a:solidFill>
-              <a:srgbClr val="000000"/>
-            </a:solidFill>
-          </a:ln>
-          <a:effectLst/>
-        </p:spPr>
-        <p:style>
-          <a:lnRef idx="1">
-            <a:schemeClr val="accent1"/>
-          </a:lnRef>
-          <a:fillRef idx="3">
-            <a:schemeClr val="accent1"/>
-          </a:fillRef>
-          <a:effectRef idx="2">
-            <a:schemeClr val="accent1"/>
-          </a:effectRef>
-          <a:fontRef idx="minor">
-            <a:schemeClr val="lt1"/>
-          </a:fontRef>
-        </p:style>
-        <p:txBody>
-          <a:bodyPr rtlCol="0" anchor="ctr"/>
-          <a:lstStyle/>
-          <a:p/>
-        </p:txBody>
-      </p:sp>
-      <p:sp>
-        <p:nvSpPr>
-          <p:cNvPr id="6" name="Rectangle 5"/>
-          <p:cNvSpPr/>
-          <p:nvPr/>
-        </p:nvSpPr>
-        <p:spPr>
-          <a:xfrm>
-            <a:off x="594360" y="1783080"/>
-            <a:ext cx="777240" cy="724204"/>
-          </a:xfrm>
-          <a:prstGeom prst="rect">
-            <a:avLst/>
-          </a:prstGeom>
-          <a:solidFill>
-            <a:srgbClr val="00D9E1"/>
-          </a:solidFill>
-          <a:ln w="34925">
-            <a:solidFill>
-              <a:srgbClr val="000000"/>
-            </a:solidFill>
-          </a:ln>
-          <a:effectLst/>
-        </p:spPr>
-        <p:style>
-          <a:lnRef idx="1">
-            <a:schemeClr val="accent1"/>
-          </a:lnRef>
-          <a:fillRef idx="3">
-            <a:schemeClr val="accent1"/>
-          </a:fillRef>
-          <a:effectRef idx="2">
-            <a:schemeClr val="accent1"/>
-          </a:effectRef>
-          <a:fontRef idx="minor">
-            <a:schemeClr val="lt1"/>
-          </a:fontRef>
-        </p:style>
-        <p:txBody>
-          <a:bodyPr rtlCol="0" anchor="ctr"/>
-          <a:lstStyle/>
-          <a:p/>
-        </p:txBody>
-      </p:sp>
-      <p:sp>
-        <p:nvSpPr>
-          <p:cNvPr id="7" name="TextBox 6"/>
-          <p:cNvSpPr txBox="1"/>
-          <p:nvPr/>
-        </p:nvSpPr>
-        <p:spPr>
-          <a:xfrm>
-            <a:off x="594360" y="2044598"/>
-            <a:ext cx="777240" cy="274320"/>
-          </a:xfrm>
-          <a:prstGeom prst="rect">
-            <a:avLst/>
-          </a:prstGeom>
-          <a:noFill/>
-        </p:spPr>
-        <p:txBody>
-          <a:bodyPr wrap="square" lIns="0" rIns="0" tIns="0" bIns="0" anchor="t">
-            <a:spAutoFit/>
-          </a:bodyPr>
-          <a:lstStyle/>
-          <a:p>
-            <a:pPr algn="ctr"/>
-            <a:r>
-              <a:rPr sz="1500" b="1">
-                <a:solidFill>
-                  <a:srgbClr val="000000"/>
-                </a:solidFill>
-                <a:latin typeface="Arial"/>
-              </a:rPr>
-              <a:t>01</a:t>
-            </a:r>
-          </a:p>
-        </p:txBody>
-      </p:sp>
-      <p:sp>
-        <p:nvSpPr>
-          <p:cNvPr id="8" name="Rectangle 7"/>
-          <p:cNvSpPr/>
-          <p:nvPr/>
-        </p:nvSpPr>
-        <p:spPr>
-          <a:xfrm>
-            <a:off x="1714499" y="1851660"/>
-            <a:ext cx="9921240" cy="724204"/>
-          </a:xfrm>
-          <a:prstGeom prst="rect">
-            <a:avLst/>
-          </a:prstGeom>
-          <a:solidFill>
-            <a:srgbClr val="000000"/>
-          </a:solidFill>
-          <a:ln w="6350">
-            <a:solidFill>
-              <a:srgbClr val="000000"/>
-            </a:solidFill>
-          </a:ln>
-          <a:effectLst/>
-        </p:spPr>
-        <p:style>
-          <a:lnRef idx="1">
-            <a:schemeClr val="accent1"/>
-          </a:lnRef>
-          <a:fillRef idx="3">
-            <a:schemeClr val="accent1"/>
-          </a:fillRef>
-          <a:effectRef idx="2">
-            <a:schemeClr val="accent1"/>
-          </a:effectRef>
-          <a:fontRef idx="minor">
-            <a:schemeClr val="lt1"/>
-          </a:fontRef>
-        </p:style>
-        <p:txBody>
-          <a:bodyPr rtlCol="0" anchor="ctr"/>
-          <a:lstStyle/>
-          <a:p/>
-        </p:txBody>
-      </p:sp>
-      <p:sp>
-        <p:nvSpPr>
-          <p:cNvPr id="9" name="Rectangle 8"/>
-          <p:cNvSpPr/>
-          <p:nvPr/>
-        </p:nvSpPr>
-        <p:spPr>
-          <a:xfrm>
-            <a:off x="1645919" y="1783080"/>
-            <a:ext cx="9921240" cy="724204"/>
-          </a:xfrm>
-          <a:prstGeom prst="rect">
-            <a:avLst/>
-          </a:prstGeom>
-          <a:solidFill>
-            <a:srgbClr val="FFFDF7"/>
-          </a:solidFill>
-          <a:ln w="34925">
-            <a:solidFill>
-              <a:srgbClr val="000000"/>
-            </a:solidFill>
-          </a:ln>
-          <a:effectLst/>
-        </p:spPr>
-        <p:style>
-          <a:lnRef idx="1">
-            <a:schemeClr val="accent1"/>
-          </a:lnRef>
-          <a:fillRef idx="3">
-            <a:schemeClr val="accent1"/>
-          </a:fillRef>
-          <a:effectRef idx="2">
-            <a:schemeClr val="accent1"/>
-          </a:effectRef>
-          <a:fontRef idx="minor">
-            <a:schemeClr val="lt1"/>
-          </a:fontRef>
-        </p:style>
-        <p:txBody>
-          <a:bodyPr rtlCol="0" anchor="ctr"/>
-          <a:lstStyle/>
-          <a:p/>
-        </p:txBody>
-      </p:sp>
-      <p:sp>
-        <p:nvSpPr>
-          <p:cNvPr id="10" name="TextBox 9"/>
-          <p:cNvSpPr txBox="1"/>
-          <p:nvPr/>
-        </p:nvSpPr>
-        <p:spPr>
-          <a:xfrm>
-            <a:off x="1920240" y="1874519"/>
-            <a:ext cx="9372600" cy="541324"/>
-          </a:xfrm>
-          <a:prstGeom prst="rect">
-            <a:avLst/>
-          </a:prstGeom>
-          <a:noFill/>
-        </p:spPr>
-        <p:txBody>
-          <a:bodyPr wrap="square" lIns="0" rIns="0" tIns="0" bIns="0" anchor="ctr">
-            <a:spAutoFit/>
-          </a:bodyPr>
-          <a:lstStyle/>
-          <a:p>
-            <a:pPr algn="l">
-              <a:lnSpc>
-                <a:spcPct val="125000"/>
-              </a:lnSpc>
-            </a:pPr>
-            <a:r>
-              <a:rPr sz="1300">
-                <a:solidFill>
-                  <a:srgbClr val="000000"/>
-                </a:solidFill>
-                <a:latin typeface="Calibri"/>
-              </a:rPr>
-              <a:t>Pick a site you can document and state why you chose it. Record the source of the site model or data, its units, scale and orientation.</a:t>
-            </a:r>
-          </a:p>
-        </p:txBody>
-      </p:sp>
-      <p:sp>
-        <p:nvSpPr>
-          <p:cNvPr id="11" name="Rectangle 10"/>
-          <p:cNvSpPr/>
-          <p:nvPr/>
-        </p:nvSpPr>
-        <p:spPr>
-          <a:xfrm>
-            <a:off x="662940" y="2722168"/>
-            <a:ext cx="777240" cy="724204"/>
-          </a:xfrm>
-          <a:prstGeom prst="rect">
-            <a:avLst/>
-          </a:prstGeom>
-          <a:solidFill>
-            <a:srgbClr val="000000"/>
-          </a:solidFill>
-          <a:ln w="6350">
-            <a:solidFill>
-              <a:srgbClr val="000000"/>
-            </a:solidFill>
-          </a:ln>
-          <a:effectLst/>
-        </p:spPr>
-        <p:style>
-          <a:lnRef idx="1">
-            <a:schemeClr val="accent1"/>
-          </a:lnRef>
-          <a:fillRef idx="3">
-            <a:schemeClr val="accent1"/>
-          </a:fillRef>
-          <a:effectRef idx="2">
-            <a:schemeClr val="accent1"/>
-          </a:effectRef>
-          <a:fontRef idx="minor">
-            <a:schemeClr val="lt1"/>
-          </a:fontRef>
-        </p:style>
-        <p:txBody>
-          <a:bodyPr rtlCol="0" anchor="ctr"/>
-          <a:lstStyle/>
-          <a:p/>
-        </p:txBody>
-      </p:sp>
-      <p:sp>
-        <p:nvSpPr>
-          <p:cNvPr id="12" name="Rectangle 11"/>
-          <p:cNvSpPr/>
-          <p:nvPr/>
-        </p:nvSpPr>
-        <p:spPr>
-          <a:xfrm>
-            <a:off x="594360" y="2653588"/>
-            <a:ext cx="777240" cy="724204"/>
-          </a:xfrm>
-          <a:prstGeom prst="rect">
-            <a:avLst/>
-          </a:prstGeom>
-          <a:solidFill>
-            <a:srgbClr val="C6F035"/>
-          </a:solidFill>
-          <a:ln w="34925">
-            <a:solidFill>
-              <a:srgbClr val="000000"/>
-            </a:solidFill>
-          </a:ln>
-          <a:effectLst/>
-        </p:spPr>
-        <p:style>
-          <a:lnRef idx="1">
-            <a:schemeClr val="accent1"/>
-          </a:lnRef>
-          <a:fillRef idx="3">
-            <a:schemeClr val="accent1"/>
-          </a:fillRef>
-          <a:effectRef idx="2">
-            <a:schemeClr val="accent1"/>
-          </a:effectRef>
-          <a:fontRef idx="minor">
-            <a:schemeClr val="lt1"/>
-          </a:fontRef>
-        </p:style>
-        <p:txBody>
-          <a:bodyPr rtlCol="0" anchor="ctr"/>
-          <a:lstStyle/>
-          <a:p/>
-        </p:txBody>
-      </p:sp>
-      <p:sp>
-        <p:nvSpPr>
-          <p:cNvPr id="13" name="TextBox 12"/>
-          <p:cNvSpPr txBox="1"/>
-          <p:nvPr/>
-        </p:nvSpPr>
-        <p:spPr>
-          <a:xfrm>
-            <a:off x="594360" y="2915107"/>
-            <a:ext cx="777240" cy="274320"/>
-          </a:xfrm>
-          <a:prstGeom prst="rect">
-            <a:avLst/>
-          </a:prstGeom>
-          <a:noFill/>
-        </p:spPr>
-        <p:txBody>
-          <a:bodyPr wrap="square" lIns="0" rIns="0" tIns="0" bIns="0" anchor="t">
-            <a:spAutoFit/>
-          </a:bodyPr>
-          <a:lstStyle/>
-          <a:p>
-            <a:pPr algn="ctr"/>
-            <a:r>
-              <a:rPr sz="1500" b="1">
-                <a:solidFill>
-                  <a:srgbClr val="000000"/>
-                </a:solidFill>
-                <a:latin typeface="Arial"/>
-              </a:rPr>
-              <a:t>02</a:t>
-            </a:r>
-          </a:p>
-        </p:txBody>
-      </p:sp>
-      <p:sp>
-        <p:nvSpPr>
-          <p:cNvPr id="14" name="Rectangle 13"/>
-          <p:cNvSpPr/>
-          <p:nvPr/>
-        </p:nvSpPr>
-        <p:spPr>
-          <a:xfrm>
-            <a:off x="1714499" y="2722168"/>
-            <a:ext cx="9921240" cy="724204"/>
-          </a:xfrm>
-          <a:prstGeom prst="rect">
-            <a:avLst/>
-          </a:prstGeom>
-          <a:solidFill>
-            <a:srgbClr val="000000"/>
-          </a:solidFill>
-          <a:ln w="6350">
-            <a:solidFill>
-              <a:srgbClr val="000000"/>
-            </a:solidFill>
-          </a:ln>
-          <a:effectLst/>
-        </p:spPr>
-        <p:style>
-          <a:lnRef idx="1">
-            <a:schemeClr val="accent1"/>
-          </a:lnRef>
-          <a:fillRef idx="3">
-            <a:schemeClr val="accent1"/>
-          </a:fillRef>
-          <a:effectRef idx="2">
-            <a:schemeClr val="accent1"/>
-          </a:effectRef>
-          <a:fontRef idx="minor">
-            <a:schemeClr val="lt1"/>
-          </a:fontRef>
-        </p:style>
-        <p:txBody>
-          <a:bodyPr rtlCol="0" anchor="ctr"/>
-          <a:lstStyle/>
-          <a:p/>
-        </p:txBody>
-      </p:sp>
-      <p:sp>
-        <p:nvSpPr>
-          <p:cNvPr id="15" name="Rectangle 14"/>
-          <p:cNvSpPr/>
-          <p:nvPr/>
-        </p:nvSpPr>
-        <p:spPr>
-          <a:xfrm>
-            <a:off x="1645919" y="2653588"/>
-            <a:ext cx="9921240" cy="724204"/>
-          </a:xfrm>
-          <a:prstGeom prst="rect">
-            <a:avLst/>
-          </a:prstGeom>
-          <a:solidFill>
-            <a:srgbClr val="FFFDF7"/>
-          </a:solidFill>
-          <a:ln w="34925">
-            <a:solidFill>
-              <a:srgbClr val="000000"/>
-            </a:solidFill>
-          </a:ln>
-          <a:effectLst/>
-        </p:spPr>
-        <p:style>
-          <a:lnRef idx="1">
-            <a:schemeClr val="accent1"/>
-          </a:lnRef>
-          <a:fillRef idx="3">
-            <a:schemeClr val="accent1"/>
-          </a:fillRef>
-          <a:effectRef idx="2">
-            <a:schemeClr val="accent1"/>
-          </a:effectRef>
-          <a:fontRef idx="minor">
-            <a:schemeClr val="lt1"/>
-          </a:fontRef>
-        </p:style>
-        <p:txBody>
-          <a:bodyPr rtlCol="0" anchor="ctr"/>
-          <a:lstStyle/>
-          <a:p/>
-        </p:txBody>
-      </p:sp>
-      <p:sp>
-        <p:nvSpPr>
-          <p:cNvPr id="16" name="TextBox 15"/>
-          <p:cNvSpPr txBox="1"/>
-          <p:nvPr/>
-        </p:nvSpPr>
-        <p:spPr>
-          <a:xfrm>
-            <a:off x="1920240" y="2745028"/>
-            <a:ext cx="9372600" cy="541324"/>
-          </a:xfrm>
-          <a:prstGeom prst="rect">
-            <a:avLst/>
-          </a:prstGeom>
-          <a:noFill/>
-        </p:spPr>
-        <p:txBody>
-          <a:bodyPr wrap="square" lIns="0" rIns="0" tIns="0" bIns="0" anchor="ctr">
-            <a:spAutoFit/>
-          </a:bodyPr>
-          <a:lstStyle/>
-          <a:p>
-            <a:pPr algn="l">
-              <a:lnSpc>
-                <a:spcPct val="125000"/>
-              </a:lnSpc>
-            </a:pPr>
-            <a:r>
-              <a:rPr sz="1300">
-                <a:solidFill>
-                  <a:srgbClr val="000000"/>
-                </a:solidFill>
-                <a:latin typeface="Calibri"/>
-              </a:rPr>
-              <a:t>Analyze the site with the Mixtli add-on for Blender, provided by the instructor. Record the analysis type, inputs and settings.</a:t>
-            </a:r>
-          </a:p>
-        </p:txBody>
-      </p:sp>
-      <p:sp>
-        <p:nvSpPr>
-          <p:cNvPr id="17" name="Rectangle 16"/>
-          <p:cNvSpPr/>
-          <p:nvPr/>
-        </p:nvSpPr>
-        <p:spPr>
-          <a:xfrm>
-            <a:off x="662940" y="3592677"/>
-            <a:ext cx="777240" cy="724204"/>
-          </a:xfrm>
-          <a:prstGeom prst="rect">
-            <a:avLst/>
-          </a:prstGeom>
-          <a:solidFill>
-            <a:srgbClr val="000000"/>
-          </a:solidFill>
-          <a:ln w="6350">
-            <a:solidFill>
-              <a:srgbClr val="000000"/>
-            </a:solidFill>
-          </a:ln>
-          <a:effectLst/>
-        </p:spPr>
-        <p:style>
-          <a:lnRef idx="1">
-            <a:schemeClr val="accent1"/>
-          </a:lnRef>
-          <a:fillRef idx="3">
-            <a:schemeClr val="accent1"/>
-          </a:fillRef>
-          <a:effectRef idx="2">
-            <a:schemeClr val="accent1"/>
-          </a:effectRef>
-          <a:fontRef idx="minor">
-            <a:schemeClr val="lt1"/>
-          </a:fontRef>
-        </p:style>
-        <p:txBody>
-          <a:bodyPr rtlCol="0" anchor="ctr"/>
-          <a:lstStyle/>
-          <a:p/>
-        </p:txBody>
-      </p:sp>
-      <p:sp>
-        <p:nvSpPr>
-          <p:cNvPr id="18" name="Rectangle 17"/>
-          <p:cNvSpPr/>
-          <p:nvPr/>
-        </p:nvSpPr>
-        <p:spPr>
-          <a:xfrm>
-            <a:off x="594360" y="3524097"/>
-            <a:ext cx="777240" cy="724204"/>
-          </a:xfrm>
-          <a:prstGeom prst="rect">
-            <a:avLst/>
-          </a:prstGeom>
-          <a:solidFill>
-            <a:srgbClr val="FFE500"/>
-          </a:solidFill>
-          <a:ln w="34925">
-            <a:solidFill>
-              <a:srgbClr val="000000"/>
-            </a:solidFill>
-          </a:ln>
-          <a:effectLst/>
-        </p:spPr>
-        <p:style>
-          <a:lnRef idx="1">
-            <a:schemeClr val="accent1"/>
-          </a:lnRef>
-          <a:fillRef idx="3">
-            <a:schemeClr val="accent1"/>
-          </a:fillRef>
-          <a:effectRef idx="2">
-            <a:schemeClr val="accent1"/>
-          </a:effectRef>
-          <a:fontRef idx="minor">
-            <a:schemeClr val="lt1"/>
-          </a:fontRef>
-        </p:style>
-        <p:txBody>
-          <a:bodyPr rtlCol="0" anchor="ctr"/>
-          <a:lstStyle/>
-          <a:p/>
-        </p:txBody>
-      </p:sp>
-      <p:sp>
-        <p:nvSpPr>
-          <p:cNvPr id="19" name="TextBox 18"/>
-          <p:cNvSpPr txBox="1"/>
-          <p:nvPr/>
-        </p:nvSpPr>
-        <p:spPr>
-          <a:xfrm>
-            <a:off x="594360" y="3785615"/>
-            <a:ext cx="777240" cy="274320"/>
-          </a:xfrm>
-          <a:prstGeom prst="rect">
-            <a:avLst/>
-          </a:prstGeom>
-          <a:noFill/>
-        </p:spPr>
-        <p:txBody>
-          <a:bodyPr wrap="square" lIns="0" rIns="0" tIns="0" bIns="0" anchor="t">
-            <a:spAutoFit/>
-          </a:bodyPr>
-          <a:lstStyle/>
-          <a:p>
-            <a:pPr algn="ctr"/>
-            <a:r>
-              <a:rPr sz="1500" b="1">
-                <a:solidFill>
-                  <a:srgbClr val="000000"/>
-                </a:solidFill>
-                <a:latin typeface="Arial"/>
-              </a:rPr>
-              <a:t>03</a:t>
-            </a:r>
-          </a:p>
-        </p:txBody>
-      </p:sp>
-      <p:sp>
-        <p:nvSpPr>
-          <p:cNvPr id="20" name="Rectangle 19"/>
-          <p:cNvSpPr/>
-          <p:nvPr/>
-        </p:nvSpPr>
-        <p:spPr>
-          <a:xfrm>
-            <a:off x="1714499" y="3592677"/>
-            <a:ext cx="9921240" cy="724204"/>
-          </a:xfrm>
-          <a:prstGeom prst="rect">
-            <a:avLst/>
-          </a:prstGeom>
-          <a:solidFill>
-            <a:srgbClr val="000000"/>
-          </a:solidFill>
-          <a:ln w="6350">
-            <a:solidFill>
-              <a:srgbClr val="000000"/>
-            </a:solidFill>
-          </a:ln>
-          <a:effectLst/>
-        </p:spPr>
-        <p:style>
-          <a:lnRef idx="1">
-            <a:schemeClr val="accent1"/>
-          </a:lnRef>
-          <a:fillRef idx="3">
-            <a:schemeClr val="accent1"/>
-          </a:fillRef>
-          <a:effectRef idx="2">
-            <a:schemeClr val="accent1"/>
-          </a:effectRef>
-          <a:fontRef idx="minor">
-            <a:schemeClr val="lt1"/>
-          </a:fontRef>
-        </p:style>
-        <p:txBody>
-          <a:bodyPr rtlCol="0" anchor="ctr"/>
-          <a:lstStyle/>
-          <a:p/>
-        </p:txBody>
-      </p:sp>
-      <p:sp>
-        <p:nvSpPr>
-          <p:cNvPr id="21" name="Rectangle 20"/>
-          <p:cNvSpPr/>
-          <p:nvPr/>
-        </p:nvSpPr>
-        <p:spPr>
-          <a:xfrm>
-            <a:off x="1645919" y="3524097"/>
-            <a:ext cx="9921240" cy="724204"/>
-          </a:xfrm>
-          <a:prstGeom prst="rect">
-            <a:avLst/>
-          </a:prstGeom>
-          <a:solidFill>
-            <a:srgbClr val="FFFDF7"/>
-          </a:solidFill>
-          <a:ln w="34925">
-            <a:solidFill>
-              <a:srgbClr val="000000"/>
-            </a:solidFill>
-          </a:ln>
-          <a:effectLst/>
-        </p:spPr>
-        <p:style>
-          <a:lnRef idx="1">
-            <a:schemeClr val="accent1"/>
-          </a:lnRef>
-          <a:fillRef idx="3">
-            <a:schemeClr val="accent1"/>
-          </a:fillRef>
-          <a:effectRef idx="2">
-            <a:schemeClr val="accent1"/>
-          </a:effectRef>
-          <a:fontRef idx="minor">
-            <a:schemeClr val="lt1"/>
-          </a:fontRef>
-        </p:style>
-        <p:txBody>
-          <a:bodyPr rtlCol="0" anchor="ctr"/>
-          <a:lstStyle/>
-          <a:p/>
-        </p:txBody>
-      </p:sp>
-      <p:sp>
-        <p:nvSpPr>
-          <p:cNvPr id="22" name="TextBox 21"/>
-          <p:cNvSpPr txBox="1"/>
-          <p:nvPr/>
-        </p:nvSpPr>
-        <p:spPr>
-          <a:xfrm>
-            <a:off x="1920240" y="3615537"/>
-            <a:ext cx="9372600" cy="541324"/>
-          </a:xfrm>
-          <a:prstGeom prst="rect">
-            <a:avLst/>
-          </a:prstGeom>
-          <a:noFill/>
-        </p:spPr>
-        <p:txBody>
-          <a:bodyPr wrap="square" lIns="0" rIns="0" tIns="0" bIns="0" anchor="ctr">
-            <a:spAutoFit/>
-          </a:bodyPr>
-          <a:lstStyle/>
-          <a:p>
-            <a:pPr algn="l">
-              <a:lnSpc>
-                <a:spcPct val="125000"/>
-              </a:lnSpc>
-            </a:pPr>
-            <a:r>
-              <a:rPr sz="1300">
-                <a:solidFill>
-                  <a:srgbClr val="000000"/>
-                </a:solidFill>
-                <a:latin typeface="Calibri"/>
-              </a:rPr>
-              <a:t>Make one 17 × 11 inch sheet with an annotated site plan or base view, the mapped analysis with a legend and units, and one comparison of settings, times or conditions.</a:t>
-            </a:r>
-          </a:p>
-        </p:txBody>
-      </p:sp>
-      <p:sp>
-        <p:nvSpPr>
-          <p:cNvPr id="23" name="Rectangle 22"/>
-          <p:cNvSpPr/>
-          <p:nvPr/>
-        </p:nvSpPr>
-        <p:spPr>
-          <a:xfrm>
-            <a:off x="662940" y="4463186"/>
-            <a:ext cx="777240" cy="724204"/>
-          </a:xfrm>
-          <a:prstGeom prst="rect">
-            <a:avLst/>
-          </a:prstGeom>
-          <a:solidFill>
-            <a:srgbClr val="000000"/>
-          </a:solidFill>
-          <a:ln w="6350">
-            <a:solidFill>
-              <a:srgbClr val="000000"/>
-            </a:solidFill>
-          </a:ln>
-          <a:effectLst/>
-        </p:spPr>
-        <p:style>
-          <a:lnRef idx="1">
-            <a:schemeClr val="accent1"/>
-          </a:lnRef>
-          <a:fillRef idx="3">
-            <a:schemeClr val="accent1"/>
-          </a:fillRef>
-          <a:effectRef idx="2">
-            <a:schemeClr val="accent1"/>
-          </a:effectRef>
-          <a:fontRef idx="minor">
-            <a:schemeClr val="lt1"/>
-          </a:fontRef>
-        </p:style>
-        <p:txBody>
-          <a:bodyPr rtlCol="0" anchor="ctr"/>
-          <a:lstStyle/>
-          <a:p/>
-        </p:txBody>
-      </p:sp>
-      <p:sp>
-        <p:nvSpPr>
-          <p:cNvPr id="24" name="Rectangle 23"/>
-          <p:cNvSpPr/>
-          <p:nvPr/>
-        </p:nvSpPr>
-        <p:spPr>
-          <a:xfrm>
-            <a:off x="594360" y="4394606"/>
-            <a:ext cx="777240" cy="724204"/>
-          </a:xfrm>
-          <a:prstGeom prst="rect">
-            <a:avLst/>
-          </a:prstGeom>
-          <a:solidFill>
-            <a:srgbClr val="FF4D8D"/>
-          </a:solidFill>
-          <a:ln w="34925">
-            <a:solidFill>
-              <a:srgbClr val="000000"/>
-            </a:solidFill>
-          </a:ln>
-          <a:effectLst/>
-        </p:spPr>
-        <p:style>
-          <a:lnRef idx="1">
-            <a:schemeClr val="accent1"/>
-          </a:lnRef>
-          <a:fillRef idx="3">
-            <a:schemeClr val="accent1"/>
-          </a:fillRef>
-          <a:effectRef idx="2">
-            <a:schemeClr val="accent1"/>
-          </a:effectRef>
-          <a:fontRef idx="minor">
-            <a:schemeClr val="lt1"/>
-          </a:fontRef>
-        </p:style>
-        <p:txBody>
-          <a:bodyPr rtlCol="0" anchor="ctr"/>
-          <a:lstStyle/>
-          <a:p/>
-        </p:txBody>
-      </p:sp>
-      <p:sp>
-        <p:nvSpPr>
-          <p:cNvPr id="25" name="TextBox 24"/>
-          <p:cNvSpPr txBox="1"/>
-          <p:nvPr/>
-        </p:nvSpPr>
-        <p:spPr>
-          <a:xfrm>
-            <a:off x="594360" y="4656124"/>
-            <a:ext cx="777240" cy="274320"/>
-          </a:xfrm>
-          <a:prstGeom prst="rect">
-            <a:avLst/>
-          </a:prstGeom>
-          <a:noFill/>
-        </p:spPr>
-        <p:txBody>
-          <a:bodyPr wrap="square" lIns="0" rIns="0" tIns="0" bIns="0" anchor="t">
-            <a:spAutoFit/>
-          </a:bodyPr>
-          <a:lstStyle/>
-          <a:p>
-            <a:pPr algn="ctr"/>
-            <a:r>
-              <a:rPr sz="1500" b="1">
-                <a:solidFill>
-                  <a:srgbClr val="000000"/>
-                </a:solidFill>
-                <a:latin typeface="Arial"/>
-              </a:rPr>
-              <a:t>04</a:t>
-            </a:r>
-          </a:p>
-        </p:txBody>
-      </p:sp>
-      <p:sp>
-        <p:nvSpPr>
-          <p:cNvPr id="26" name="Rectangle 25"/>
-          <p:cNvSpPr/>
-          <p:nvPr/>
-        </p:nvSpPr>
-        <p:spPr>
-          <a:xfrm>
-            <a:off x="1714499" y="4463186"/>
-            <a:ext cx="9921240" cy="724204"/>
-          </a:xfrm>
-          <a:prstGeom prst="rect">
-            <a:avLst/>
-          </a:prstGeom>
-          <a:solidFill>
-            <a:srgbClr val="000000"/>
-          </a:solidFill>
-          <a:ln w="6350">
-            <a:solidFill>
-              <a:srgbClr val="000000"/>
-            </a:solidFill>
-          </a:ln>
-          <a:effectLst/>
-        </p:spPr>
-        <p:style>
-          <a:lnRef idx="1">
-            <a:schemeClr val="accent1"/>
-          </a:lnRef>
-          <a:fillRef idx="3">
-            <a:schemeClr val="accent1"/>
-          </a:fillRef>
-          <a:effectRef idx="2">
-            <a:schemeClr val="accent1"/>
-          </a:effectRef>
-          <a:fontRef idx="minor">
-            <a:schemeClr val="lt1"/>
-          </a:fontRef>
-        </p:style>
-        <p:txBody>
-          <a:bodyPr rtlCol="0" anchor="ctr"/>
-          <a:lstStyle/>
-          <a:p/>
-        </p:txBody>
-      </p:sp>
-      <p:sp>
-        <p:nvSpPr>
-          <p:cNvPr id="27" name="Rectangle 26"/>
-          <p:cNvSpPr/>
-          <p:nvPr/>
-        </p:nvSpPr>
-        <p:spPr>
-          <a:xfrm>
-            <a:off x="1645919" y="4394606"/>
-            <a:ext cx="9921240" cy="724204"/>
-          </a:xfrm>
-          <a:prstGeom prst="rect">
-            <a:avLst/>
-          </a:prstGeom>
-          <a:solidFill>
-            <a:srgbClr val="FFFDF7"/>
-          </a:solidFill>
-          <a:ln w="34925">
-            <a:solidFill>
-              <a:srgbClr val="000000"/>
-            </a:solidFill>
-          </a:ln>
-          <a:effectLst/>
-        </p:spPr>
-        <p:style>
-          <a:lnRef idx="1">
-            <a:schemeClr val="accent1"/>
-          </a:lnRef>
-          <a:fillRef idx="3">
-            <a:schemeClr val="accent1"/>
-          </a:fillRef>
-          <a:effectRef idx="2">
-            <a:schemeClr val="accent1"/>
-          </a:effectRef>
-          <a:fontRef idx="minor">
-            <a:schemeClr val="lt1"/>
-          </a:fontRef>
-        </p:style>
-        <p:txBody>
-          <a:bodyPr rtlCol="0" anchor="ctr"/>
-          <a:lstStyle/>
-          <a:p/>
-        </p:txBody>
-      </p:sp>
-      <p:sp>
-        <p:nvSpPr>
-          <p:cNvPr id="28" name="TextBox 27"/>
-          <p:cNvSpPr txBox="1"/>
-          <p:nvPr/>
-        </p:nvSpPr>
-        <p:spPr>
-          <a:xfrm>
-            <a:off x="1920240" y="4486046"/>
-            <a:ext cx="9372600" cy="541324"/>
-          </a:xfrm>
-          <a:prstGeom prst="rect">
-            <a:avLst/>
-          </a:prstGeom>
-          <a:noFill/>
-        </p:spPr>
-        <p:txBody>
-          <a:bodyPr wrap="square" lIns="0" rIns="0" tIns="0" bIns="0" anchor="ctr">
-            <a:spAutoFit/>
-          </a:bodyPr>
-          <a:lstStyle/>
-          <a:p>
-            <a:pPr algn="l">
-              <a:lnSpc>
-                <a:spcPct val="125000"/>
-              </a:lnSpc>
-            </a:pPr>
-            <a:r>
-              <a:rPr sz="1300">
-                <a:solidFill>
-                  <a:srgbClr val="000000"/>
-                </a:solidFill>
-                <a:latin typeface="Calibri"/>
-              </a:rPr>
-              <a:t>Explain what the output measures, how it reads as a field — the same distance-and-remap logic as P3c — and how it informs one spatial decision on the site.</a:t>
-            </a:r>
-          </a:p>
-        </p:txBody>
-      </p:sp>
-      <p:sp>
-        <p:nvSpPr>
-          <p:cNvPr id="29" name="Rectangle 28"/>
-          <p:cNvSpPr/>
-          <p:nvPr/>
-        </p:nvSpPr>
-        <p:spPr>
-          <a:xfrm>
-            <a:off x="662940" y="5333695"/>
-            <a:ext cx="777240" cy="724204"/>
-          </a:xfrm>
-          <a:prstGeom prst="rect">
-            <a:avLst/>
-          </a:prstGeom>
-          <a:solidFill>
-            <a:srgbClr val="000000"/>
-          </a:solidFill>
-          <a:ln w="6350">
-            <a:solidFill>
-              <a:srgbClr val="000000"/>
-            </a:solidFill>
-          </a:ln>
-          <a:effectLst/>
-        </p:spPr>
-        <p:style>
-          <a:lnRef idx="1">
-            <a:schemeClr val="accent1"/>
-          </a:lnRef>
-          <a:fillRef idx="3">
-            <a:schemeClr val="accent1"/>
-          </a:fillRef>
-          <a:effectRef idx="2">
-            <a:schemeClr val="accent1"/>
-          </a:effectRef>
-          <a:fontRef idx="minor">
-            <a:schemeClr val="lt1"/>
-          </a:fontRef>
-        </p:style>
-        <p:txBody>
-          <a:bodyPr rtlCol="0" anchor="ctr"/>
-          <a:lstStyle/>
-          <a:p/>
-        </p:txBody>
-      </p:sp>
-      <p:sp>
-        <p:nvSpPr>
-          <p:cNvPr id="30" name="Rectangle 29"/>
-          <p:cNvSpPr/>
-          <p:nvPr/>
-        </p:nvSpPr>
-        <p:spPr>
-          <a:xfrm>
-            <a:off x="594360" y="5265115"/>
-            <a:ext cx="777240" cy="724204"/>
-          </a:xfrm>
-          <a:prstGeom prst="rect">
-            <a:avLst/>
-          </a:prstGeom>
-          <a:solidFill>
-            <a:srgbClr val="00D9E1"/>
-          </a:solidFill>
-          <a:ln w="34925">
-            <a:solidFill>
-              <a:srgbClr val="000000"/>
-            </a:solidFill>
-          </a:ln>
-          <a:effectLst/>
-        </p:spPr>
-        <p:style>
-          <a:lnRef idx="1">
-            <a:schemeClr val="accent1"/>
-          </a:lnRef>
-          <a:fillRef idx="3">
-            <a:schemeClr val="accent1"/>
-          </a:fillRef>
-          <a:effectRef idx="2">
-            <a:schemeClr val="accent1"/>
-          </a:effectRef>
-          <a:fontRef idx="minor">
-            <a:schemeClr val="lt1"/>
-          </a:fontRef>
-        </p:style>
-        <p:txBody>
-          <a:bodyPr rtlCol="0" anchor="ctr"/>
-          <a:lstStyle/>
-          <a:p/>
-        </p:txBody>
-      </p:sp>
-      <p:sp>
-        <p:nvSpPr>
-          <p:cNvPr id="31" name="TextBox 30"/>
-          <p:cNvSpPr txBox="1"/>
-          <p:nvPr/>
-        </p:nvSpPr>
-        <p:spPr>
-          <a:xfrm>
-            <a:off x="594360" y="5526633"/>
-            <a:ext cx="777240" cy="274320"/>
-          </a:xfrm>
-          <a:prstGeom prst="rect">
-            <a:avLst/>
-          </a:prstGeom>
-          <a:noFill/>
-        </p:spPr>
-        <p:txBody>
-          <a:bodyPr wrap="square" lIns="0" rIns="0" tIns="0" bIns="0" anchor="t">
-            <a:spAutoFit/>
-          </a:bodyPr>
-          <a:lstStyle/>
-          <a:p>
-            <a:pPr algn="ctr"/>
-            <a:r>
-              <a:rPr sz="1500" b="1">
-                <a:solidFill>
-                  <a:srgbClr val="000000"/>
-                </a:solidFill>
-                <a:latin typeface="Arial"/>
-              </a:rPr>
-              <a:t>05</a:t>
-            </a:r>
-          </a:p>
-        </p:txBody>
-      </p:sp>
-      <p:sp>
-        <p:nvSpPr>
-          <p:cNvPr id="32" name="Rectangle 31"/>
-          <p:cNvSpPr/>
-          <p:nvPr/>
-        </p:nvSpPr>
-        <p:spPr>
-          <a:xfrm>
-            <a:off x="1714499" y="5333695"/>
-            <a:ext cx="9921240" cy="724204"/>
-          </a:xfrm>
-          <a:prstGeom prst="rect">
-            <a:avLst/>
-          </a:prstGeom>
-          <a:solidFill>
-            <a:srgbClr val="000000"/>
-          </a:solidFill>
-          <a:ln w="6350">
-            <a:solidFill>
-              <a:srgbClr val="000000"/>
-            </a:solidFill>
-          </a:ln>
-          <a:effectLst/>
-        </p:spPr>
-        <p:style>
-          <a:lnRef idx="1">
-            <a:schemeClr val="accent1"/>
-          </a:lnRef>
-          <a:fillRef idx="3">
-            <a:schemeClr val="accent1"/>
-          </a:fillRef>
-          <a:effectRef idx="2">
-            <a:schemeClr val="accent1"/>
-          </a:effectRef>
-          <a:fontRef idx="minor">
-            <a:schemeClr val="lt1"/>
-          </a:fontRef>
-        </p:style>
-        <p:txBody>
-          <a:bodyPr rtlCol="0" anchor="ctr"/>
-          <a:lstStyle/>
-          <a:p/>
-        </p:txBody>
-      </p:sp>
-      <p:sp>
-        <p:nvSpPr>
-          <p:cNvPr id="33" name="Rectangle 32"/>
-          <p:cNvSpPr/>
-          <p:nvPr/>
-        </p:nvSpPr>
-        <p:spPr>
-          <a:xfrm>
-            <a:off x="1645919" y="5265115"/>
-            <a:ext cx="9921240" cy="724204"/>
-          </a:xfrm>
-          <a:prstGeom prst="rect">
-            <a:avLst/>
-          </a:prstGeom>
-          <a:solidFill>
-            <a:srgbClr val="FFFDF7"/>
-          </a:solidFill>
-          <a:ln w="34925">
-            <a:solidFill>
-              <a:srgbClr val="000000"/>
-            </a:solidFill>
-          </a:ln>
-          <a:effectLst/>
-        </p:spPr>
-        <p:style>
-          <a:lnRef idx="1">
-            <a:schemeClr val="accent1"/>
-          </a:lnRef>
-          <a:fillRef idx="3">
-            <a:schemeClr val="accent1"/>
-          </a:fillRef>
-          <a:effectRef idx="2">
-            <a:schemeClr val="accent1"/>
-          </a:effectRef>
-          <a:fontRef idx="minor">
-            <a:schemeClr val="lt1"/>
-          </a:fontRef>
-        </p:style>
-        <p:txBody>
-          <a:bodyPr rtlCol="0" anchor="ctr"/>
-          <a:lstStyle/>
-          <a:p/>
-        </p:txBody>
-      </p:sp>
-      <p:sp>
-        <p:nvSpPr>
-          <p:cNvPr id="34" name="TextBox 33"/>
-          <p:cNvSpPr txBox="1"/>
-          <p:nvPr/>
-        </p:nvSpPr>
-        <p:spPr>
-          <a:xfrm>
-            <a:off x="1920240" y="5356555"/>
-            <a:ext cx="9372600" cy="541324"/>
-          </a:xfrm>
-          <a:prstGeom prst="rect">
-            <a:avLst/>
-          </a:prstGeom>
-          <a:noFill/>
-        </p:spPr>
-        <p:txBody>
-          <a:bodyPr wrap="square" lIns="0" rIns="0" tIns="0" bIns="0" anchor="ctr">
-            <a:spAutoFit/>
-          </a:bodyPr>
-          <a:lstStyle/>
-          <a:p>
-            <a:pPr algn="l">
-              <a:lnSpc>
-                <a:spcPct val="125000"/>
-              </a:lnSpc>
-            </a:pPr>
-            <a:r>
-              <a:rPr sz="1300">
-                <a:solidFill>
-                  <a:srgbClr val="000000"/>
-                </a:solidFill>
-                <a:latin typeface="Calibri"/>
-              </a:rPr>
-              <a:t>Submit the working file and dependencies. The add-on does the computation; the question, comparison and interpretation are yours.</a:t>
-            </a:r>
-          </a:p>
-        </p:txBody>
-      </p:sp>
-      <p:sp>
-        <p:nvSpPr>
-          <p:cNvPr id="35" name="Rectangle 34"/>
-          <p:cNvSpPr/>
-          <p:nvPr/>
-        </p:nvSpPr>
-        <p:spPr>
-          <a:xfrm>
-            <a:off x="662940" y="6259068"/>
-            <a:ext cx="10972800" cy="512064"/>
-          </a:xfrm>
-          <a:prstGeom prst="rect">
-            <a:avLst/>
-          </a:prstGeom>
-          <a:solidFill>
-            <a:srgbClr val="000000"/>
-          </a:solidFill>
-          <a:ln w="6350">
-            <a:solidFill>
-              <a:srgbClr val="000000"/>
-            </a:solidFill>
-          </a:ln>
-          <a:effectLst/>
-        </p:spPr>
-        <p:style>
-          <a:lnRef idx="1">
-            <a:schemeClr val="accent1"/>
-          </a:lnRef>
-          <a:fillRef idx="3">
-            <a:schemeClr val="accent1"/>
-          </a:fillRef>
-          <a:effectRef idx="2">
-            <a:schemeClr val="accent1"/>
-          </a:effectRef>
-          <a:fontRef idx="minor">
-            <a:schemeClr val="lt1"/>
-          </a:fontRef>
-        </p:style>
-        <p:txBody>
-          <a:bodyPr rtlCol="0" anchor="ctr"/>
-          <a:lstStyle/>
-          <a:p/>
-        </p:txBody>
-      </p:sp>
-      <p:sp>
-        <p:nvSpPr>
-          <p:cNvPr id="36" name="Rectangle 35"/>
-          <p:cNvSpPr/>
-          <p:nvPr/>
-        </p:nvSpPr>
-        <p:spPr>
-          <a:xfrm>
-            <a:off x="594360" y="6190488"/>
-            <a:ext cx="10972800" cy="512064"/>
-          </a:xfrm>
-          <a:prstGeom prst="rect">
-            <a:avLst/>
-          </a:prstGeom>
-          <a:solidFill>
-            <a:srgbClr val="FF4D8D"/>
-          </a:solidFill>
-          <a:ln w="34925">
-            <a:solidFill>
-              <a:srgbClr val="000000"/>
-            </a:solidFill>
-          </a:ln>
-          <a:effectLst/>
-        </p:spPr>
-        <p:style>
-          <a:lnRef idx="1">
-            <a:schemeClr val="accent1"/>
-          </a:lnRef>
-          <a:fillRef idx="3">
-            <a:schemeClr val="accent1"/>
-          </a:fillRef>
-          <a:effectRef idx="2">
-            <a:schemeClr val="accent1"/>
-          </a:effectRef>
-          <a:fontRef idx="minor">
-            <a:schemeClr val="lt1"/>
-          </a:fontRef>
-        </p:style>
-        <p:txBody>
-          <a:bodyPr rtlCol="0" anchor="ctr"/>
-          <a:lstStyle/>
-          <a:p/>
-        </p:txBody>
-      </p:sp>
-      <p:sp>
-        <p:nvSpPr>
-          <p:cNvPr id="37" name="TextBox 36"/>
-          <p:cNvSpPr txBox="1"/>
-          <p:nvPr/>
-        </p:nvSpPr>
-        <p:spPr>
-          <a:xfrm>
-            <a:off x="914400" y="6190488"/>
-            <a:ext cx="10332720" cy="512064"/>
-          </a:xfrm>
-          <a:prstGeom prst="rect">
-            <a:avLst/>
-          </a:prstGeom>
-          <a:noFill/>
-        </p:spPr>
-        <p:txBody>
-          <a:bodyPr wrap="square" lIns="0" rIns="0" tIns="0" bIns="0" anchor="ctr">
-            <a:spAutoFit/>
-          </a:bodyPr>
-          <a:lstStyle/>
-          <a:p>
-            <a:pPr algn="l"/>
-            <a:r>
-              <a:rPr sz="1150" b="1">
-                <a:solidFill>
-                  <a:srgbClr val="000000"/>
-                </a:solidFill>
-                <a:latin typeface="Arial"/>
-              </a:rPr>
-              <a:t>CHECKPOINT · WEEK 9 — Oct 20 — Bring your chosen site, one Mixtli analysis with a legend and a stated analysis question.</a:t>
-            </a:r>
-          </a:p>
-        </p:txBody>
-      </p:sp>
-    </p:spTree>
-  </p:cSld>
-  <p:clrMapOvr>
-    <a:masterClrMapping/>
-  </p:clrMapOvr>
-</p:sld>
-</file>
-
-<file path=ppt/slides/slide13.xml><?xml version="1.0" encoding="utf-8"?>
-<p:sld xmlns:a="http://schemas.openxmlformats.org/drawingml/2006/main" xmlns:p="http://schemas.openxmlformats.org/presentationml/2006/main" xmlns:r="http://schemas.openxmlformats.org/officeDocument/2006/relationships">
-  <p:cSld>
-    <p:bg>
-      <p:bgPr>
-        <a:solidFill>
-          <a:srgbClr val="C6F035"/>
-        </a:solidFill>
-        <a:effectLst/>
-      </p:bgPr>
-    </p:bg>
-    <p:spTree>
-      <p:nvGrpSpPr>
-        <p:cNvPr id="1" name=""/>
-        <p:cNvGrpSpPr/>
-        <p:nvPr/>
-      </p:nvGrpSpPr>
-      <p:grpSpPr/>
-      <p:sp>
-        <p:nvSpPr>
-          <p:cNvPr id="2" name="Rectangle 1"/>
-          <p:cNvSpPr/>
-          <p:nvPr/>
-        </p:nvSpPr>
-        <p:spPr>
-          <a:xfrm>
-            <a:off x="594360" y="566928"/>
-            <a:ext cx="10972800" cy="0"/>
-          </a:xfrm>
-          <a:prstGeom prst="rect">
-            <a:avLst/>
-          </a:prstGeom>
-          <a:noFill/>
-          <a:ln w="50800">
-            <a:solidFill>
-              <a:srgbClr val="000000"/>
-            </a:solidFill>
-          </a:ln>
-          <a:effectLst/>
-        </p:spPr>
-        <p:style>
-          <a:lnRef idx="1">
-            <a:schemeClr val="accent1"/>
-          </a:lnRef>
-          <a:fillRef idx="3">
-            <a:schemeClr val="accent1"/>
-          </a:fillRef>
-          <a:effectRef idx="2">
-            <a:schemeClr val="accent1"/>
-          </a:effectRef>
-          <a:fontRef idx="minor">
-            <a:schemeClr val="lt1"/>
-          </a:fontRef>
-        </p:style>
-        <p:txBody>
-          <a:bodyPr rtlCol="0" anchor="ctr"/>
-          <a:lstStyle/>
-          <a:p>
-            <a:pPr algn="ctr"/>
-          </a:p>
-        </p:txBody>
-      </p:sp>
-      <p:sp>
-        <p:nvSpPr>
-          <p:cNvPr id="3" name="TextBox 2"/>
-          <p:cNvSpPr txBox="1"/>
-          <p:nvPr/>
-        </p:nvSpPr>
-        <p:spPr>
-          <a:xfrm>
-            <a:off x="594360" y="676656"/>
-            <a:ext cx="10972800" cy="566928"/>
-          </a:xfrm>
-          <a:prstGeom prst="rect">
-            <a:avLst/>
-          </a:prstGeom>
-          <a:noFill/>
-        </p:spPr>
-        <p:txBody>
-          <a:bodyPr wrap="square" lIns="0" rIns="0" tIns="0" bIns="0" anchor="t">
-            <a:spAutoFit/>
-          </a:bodyPr>
-          <a:lstStyle/>
-          <a:p>
-            <a:pPr algn="l"/>
-            <a:r>
-              <a:rPr sz="3300" b="1">
-                <a:solidFill>
-                  <a:srgbClr val="000000"/>
-                </a:solidFill>
-                <a:latin typeface="Arial"/>
-              </a:rPr>
-              <a:t>NOW — FIELD TO PAPER</a:t>
-            </a:r>
-          </a:p>
-        </p:txBody>
-      </p:sp>
-      <p:sp>
-        <p:nvSpPr>
-          <p:cNvPr id="4" name="TextBox 3"/>
-          <p:cNvSpPr txBox="1"/>
-          <p:nvPr/>
-        </p:nvSpPr>
-        <p:spPr>
-          <a:xfrm>
-            <a:off x="594360" y="1691640"/>
-            <a:ext cx="10515600" cy="365760"/>
-          </a:xfrm>
-          <a:prstGeom prst="rect">
-            <a:avLst/>
-          </a:prstGeom>
-          <a:noFill/>
-        </p:spPr>
-        <p:txBody>
-          <a:bodyPr wrap="square" lIns="0" rIns="0" tIns="0" bIns="0" anchor="t">
-            <a:spAutoFit/>
-          </a:bodyPr>
-          <a:lstStyle/>
-          <a:p>
-            <a:pPr algn="l"/>
-            <a:r>
-              <a:rPr sz="1600">
-                <a:solidFill>
-                  <a:srgbClr val="000000"/>
-                </a:solidFill>
-                <a:latin typeface="Calibri"/>
-              </a:rPr>
-              <a:t>Rest of the class: build the field, translate it, export it, test it.</a:t>
-            </a:r>
-          </a:p>
-        </p:txBody>
-      </p:sp>
-      <p:sp>
-        <p:nvSpPr>
-          <p:cNvPr id="5" name="Rectangle 4"/>
-          <p:cNvSpPr/>
-          <p:nvPr/>
-        </p:nvSpPr>
-        <p:spPr>
-          <a:xfrm>
-            <a:off x="662940" y="2354580"/>
-            <a:ext cx="621792" cy="566928"/>
-          </a:xfrm>
-          <a:prstGeom prst="rect">
-            <a:avLst/>
-          </a:prstGeom>
-          <a:solidFill>
-            <a:srgbClr val="000000"/>
-          </a:solidFill>
-          <a:ln w="6350">
-            <a:solidFill>
-              <a:srgbClr val="000000"/>
-            </a:solidFill>
-          </a:ln>
-          <a:effectLst/>
-        </p:spPr>
-        <p:style>
-          <a:lnRef idx="1">
-            <a:schemeClr val="accent1"/>
-          </a:lnRef>
-          <a:fillRef idx="3">
-            <a:schemeClr val="accent1"/>
-          </a:fillRef>
-          <a:effectRef idx="2">
-            <a:schemeClr val="accent1"/>
-          </a:effectRef>
-          <a:fontRef idx="minor">
-            <a:schemeClr val="lt1"/>
-          </a:fontRef>
-        </p:style>
-        <p:txBody>
-          <a:bodyPr rtlCol="0" anchor="ctr"/>
-          <a:lstStyle/>
-          <a:p/>
-        </p:txBody>
-      </p:sp>
-      <p:sp>
-        <p:nvSpPr>
-          <p:cNvPr id="6" name="Rectangle 5"/>
-          <p:cNvSpPr/>
-          <p:nvPr/>
-        </p:nvSpPr>
-        <p:spPr>
-          <a:xfrm>
-            <a:off x="594360" y="2286000"/>
-            <a:ext cx="621792" cy="566928"/>
-          </a:xfrm>
-          <a:prstGeom prst="rect">
-            <a:avLst/>
-          </a:prstGeom>
-          <a:solidFill>
-            <a:srgbClr val="FFFDF7"/>
-          </a:solidFill>
-          <a:ln w="34925">
-            <a:solidFill>
-              <a:srgbClr val="000000"/>
-            </a:solidFill>
-          </a:ln>
-          <a:effectLst/>
-        </p:spPr>
-        <p:style>
-          <a:lnRef idx="1">
-            <a:schemeClr val="accent1"/>
-          </a:lnRef>
-          <a:fillRef idx="3">
-            <a:schemeClr val="accent1"/>
-          </a:fillRef>
-          <a:effectRef idx="2">
-            <a:schemeClr val="accent1"/>
-          </a:effectRef>
-          <a:fontRef idx="minor">
-            <a:schemeClr val="lt1"/>
-          </a:fontRef>
-        </p:style>
-        <p:txBody>
-          <a:bodyPr rtlCol="0" anchor="ctr"/>
-          <a:lstStyle/>
-          <a:p/>
-        </p:txBody>
-      </p:sp>
-      <p:sp>
-        <p:nvSpPr>
-          <p:cNvPr id="7" name="TextBox 6"/>
-          <p:cNvSpPr txBox="1"/>
-          <p:nvPr/>
-        </p:nvSpPr>
-        <p:spPr>
-          <a:xfrm>
-            <a:off x="594360" y="2468880"/>
-            <a:ext cx="621792" cy="274320"/>
-          </a:xfrm>
-          <a:prstGeom prst="rect">
-            <a:avLst/>
-          </a:prstGeom>
-          <a:noFill/>
-        </p:spPr>
-        <p:txBody>
-          <a:bodyPr wrap="square" lIns="0" rIns="0" tIns="0" bIns="0" anchor="t">
-            <a:spAutoFit/>
-          </a:bodyPr>
-          <a:lstStyle/>
-          <a:p>
-            <a:pPr algn="ctr"/>
-            <a:r>
-              <a:rPr sz="1700" b="1">
-                <a:solidFill>
-                  <a:srgbClr val="000000"/>
-                </a:solidFill>
-                <a:latin typeface="Arial"/>
-              </a:rPr>
-              <a:t>✓</a:t>
-            </a:r>
-          </a:p>
-        </p:txBody>
-      </p:sp>
-      <p:sp>
-        <p:nvSpPr>
-          <p:cNvPr id="8" name="Rectangle 7"/>
-          <p:cNvSpPr/>
-          <p:nvPr/>
-        </p:nvSpPr>
-        <p:spPr>
-          <a:xfrm>
-            <a:off x="1559051" y="2354580"/>
-            <a:ext cx="10076688" cy="566928"/>
-          </a:xfrm>
-          <a:prstGeom prst="rect">
-            <a:avLst/>
-          </a:prstGeom>
-          <a:solidFill>
-            <a:srgbClr val="000000"/>
-          </a:solidFill>
-          <a:ln w="6350">
-            <a:solidFill>
-              <a:srgbClr val="000000"/>
-            </a:solidFill>
-          </a:ln>
-          <a:effectLst/>
-        </p:spPr>
-        <p:style>
-          <a:lnRef idx="1">
-            <a:schemeClr val="accent1"/>
-          </a:lnRef>
-          <a:fillRef idx="3">
-            <a:schemeClr val="accent1"/>
-          </a:fillRef>
-          <a:effectRef idx="2">
-            <a:schemeClr val="accent1"/>
-          </a:effectRef>
-          <a:fontRef idx="minor">
-            <a:schemeClr val="lt1"/>
-          </a:fontRef>
-        </p:style>
-        <p:txBody>
-          <a:bodyPr rtlCol="0" anchor="ctr"/>
-          <a:lstStyle/>
-          <a:p/>
-        </p:txBody>
-      </p:sp>
-      <p:sp>
-        <p:nvSpPr>
-          <p:cNvPr id="9" name="Rectangle 8"/>
-          <p:cNvSpPr/>
-          <p:nvPr/>
-        </p:nvSpPr>
-        <p:spPr>
-          <a:xfrm>
-            <a:off x="1490472" y="2286000"/>
-            <a:ext cx="10076688" cy="566928"/>
-          </a:xfrm>
-          <a:prstGeom prst="rect">
-            <a:avLst/>
-          </a:prstGeom>
-          <a:solidFill>
-            <a:srgbClr val="FFFDF7"/>
-          </a:solidFill>
-          <a:ln w="34925">
-            <a:solidFill>
-              <a:srgbClr val="000000"/>
-            </a:solidFill>
-          </a:ln>
-          <a:effectLst/>
-        </p:spPr>
-        <p:style>
-          <a:lnRef idx="1">
-            <a:schemeClr val="accent1"/>
-          </a:lnRef>
-          <a:fillRef idx="3">
-            <a:schemeClr val="accent1"/>
-          </a:fillRef>
-          <a:effectRef idx="2">
-            <a:schemeClr val="accent1"/>
-          </a:effectRef>
-          <a:fontRef idx="minor">
-            <a:schemeClr val="lt1"/>
-          </a:fontRef>
-        </p:style>
-        <p:txBody>
-          <a:bodyPr rtlCol="0" anchor="ctr"/>
-          <a:lstStyle/>
-          <a:p/>
-        </p:txBody>
-      </p:sp>
-      <p:sp>
-        <p:nvSpPr>
-          <p:cNvPr id="10" name="TextBox 9"/>
-          <p:cNvSpPr txBox="1"/>
-          <p:nvPr/>
-        </p:nvSpPr>
-        <p:spPr>
-          <a:xfrm>
-            <a:off x="1764792" y="2286000"/>
-            <a:ext cx="9528048" cy="566928"/>
-          </a:xfrm>
-          <a:prstGeom prst="rect">
-            <a:avLst/>
-          </a:prstGeom>
-          <a:noFill/>
-        </p:spPr>
-        <p:txBody>
-          <a:bodyPr wrap="square" lIns="0" rIns="0" tIns="0" bIns="0" anchor="ctr">
-            <a:spAutoFit/>
-          </a:bodyPr>
-          <a:lstStyle/>
-          <a:p>
-            <a:pPr algn="l"/>
-            <a:r>
-              <a:rPr sz="1450">
-                <a:solidFill>
-                  <a:srgbClr val="000000"/>
-                </a:solidFill>
-                <a:latin typeface="Calibri"/>
-              </a:rPr>
-              <a:t>Build the 2D field: a flat grid, distance at every sample, shown as grey with a legend</a:t>
-            </a:r>
-          </a:p>
-        </p:txBody>
-      </p:sp>
-      <p:sp>
-        <p:nvSpPr>
-          <p:cNvPr id="11" name="Rectangle 10"/>
-          <p:cNvSpPr/>
-          <p:nvPr/>
-        </p:nvSpPr>
-        <p:spPr>
-          <a:xfrm>
-            <a:off x="662940" y="3067812"/>
-            <a:ext cx="621792" cy="566928"/>
-          </a:xfrm>
-          <a:prstGeom prst="rect">
-            <a:avLst/>
-          </a:prstGeom>
-          <a:solidFill>
-            <a:srgbClr val="000000"/>
-          </a:solidFill>
-          <a:ln w="6350">
-            <a:solidFill>
-              <a:srgbClr val="000000"/>
-            </a:solidFill>
-          </a:ln>
-          <a:effectLst/>
-        </p:spPr>
-        <p:style>
-          <a:lnRef idx="1">
-            <a:schemeClr val="accent1"/>
-          </a:lnRef>
-          <a:fillRef idx="3">
-            <a:schemeClr val="accent1"/>
-          </a:fillRef>
-          <a:effectRef idx="2">
-            <a:schemeClr val="accent1"/>
-          </a:effectRef>
-          <a:fontRef idx="minor">
-            <a:schemeClr val="lt1"/>
-          </a:fontRef>
-        </p:style>
-        <p:txBody>
-          <a:bodyPr rtlCol="0" anchor="ctr"/>
-          <a:lstStyle/>
-          <a:p/>
-        </p:txBody>
-      </p:sp>
-      <p:sp>
-        <p:nvSpPr>
-          <p:cNvPr id="12" name="Rectangle 11"/>
-          <p:cNvSpPr/>
-          <p:nvPr/>
-        </p:nvSpPr>
-        <p:spPr>
-          <a:xfrm>
-            <a:off x="594360" y="2999232"/>
-            <a:ext cx="621792" cy="566928"/>
-          </a:xfrm>
-          <a:prstGeom prst="rect">
-            <a:avLst/>
-          </a:prstGeom>
-          <a:solidFill>
-            <a:srgbClr val="FFFDF7"/>
-          </a:solidFill>
-          <a:ln w="34925">
-            <a:solidFill>
-              <a:srgbClr val="000000"/>
-            </a:solidFill>
-          </a:ln>
-          <a:effectLst/>
-        </p:spPr>
-        <p:style>
-          <a:lnRef idx="1">
-            <a:schemeClr val="accent1"/>
-          </a:lnRef>
-          <a:fillRef idx="3">
-            <a:schemeClr val="accent1"/>
-          </a:fillRef>
-          <a:effectRef idx="2">
-            <a:schemeClr val="accent1"/>
-          </a:effectRef>
-          <a:fontRef idx="minor">
-            <a:schemeClr val="lt1"/>
-          </a:fontRef>
-        </p:style>
-        <p:txBody>
-          <a:bodyPr rtlCol="0" anchor="ctr"/>
-          <a:lstStyle/>
-          <a:p/>
-        </p:txBody>
-      </p:sp>
-      <p:sp>
-        <p:nvSpPr>
-          <p:cNvPr id="13" name="TextBox 12"/>
-          <p:cNvSpPr txBox="1"/>
-          <p:nvPr/>
-        </p:nvSpPr>
-        <p:spPr>
-          <a:xfrm>
-            <a:off x="594360" y="3182112"/>
-            <a:ext cx="621792" cy="274320"/>
-          </a:xfrm>
-          <a:prstGeom prst="rect">
-            <a:avLst/>
-          </a:prstGeom>
-          <a:noFill/>
-        </p:spPr>
-        <p:txBody>
-          <a:bodyPr wrap="square" lIns="0" rIns="0" tIns="0" bIns="0" anchor="t">
-            <a:spAutoFit/>
-          </a:bodyPr>
-          <a:lstStyle/>
-          <a:p>
-            <a:pPr algn="ctr"/>
-            <a:r>
-              <a:rPr sz="1700" b="1">
-                <a:solidFill>
-                  <a:srgbClr val="000000"/>
-                </a:solidFill>
-                <a:latin typeface="Arial"/>
-              </a:rPr>
-              <a:t>✓</a:t>
-            </a:r>
-          </a:p>
-        </p:txBody>
-      </p:sp>
-      <p:sp>
-        <p:nvSpPr>
-          <p:cNvPr id="14" name="Rectangle 13"/>
-          <p:cNvSpPr/>
-          <p:nvPr/>
-        </p:nvSpPr>
-        <p:spPr>
-          <a:xfrm>
-            <a:off x="1559051" y="3067812"/>
-            <a:ext cx="10076688" cy="566928"/>
-          </a:xfrm>
-          <a:prstGeom prst="rect">
-            <a:avLst/>
-          </a:prstGeom>
-          <a:solidFill>
-            <a:srgbClr val="000000"/>
-          </a:solidFill>
-          <a:ln w="6350">
-            <a:solidFill>
-              <a:srgbClr val="000000"/>
-            </a:solidFill>
-          </a:ln>
-          <a:effectLst/>
-        </p:spPr>
-        <p:style>
-          <a:lnRef idx="1">
-            <a:schemeClr val="accent1"/>
-          </a:lnRef>
-          <a:fillRef idx="3">
-            <a:schemeClr val="accent1"/>
-          </a:fillRef>
-          <a:effectRef idx="2">
-            <a:schemeClr val="accent1"/>
-          </a:effectRef>
-          <a:fontRef idx="minor">
-            <a:schemeClr val="lt1"/>
-          </a:fontRef>
-        </p:style>
-        <p:txBody>
-          <a:bodyPr rtlCol="0" anchor="ctr"/>
-          <a:lstStyle/>
-          <a:p/>
-        </p:txBody>
-      </p:sp>
-      <p:sp>
-        <p:nvSpPr>
-          <p:cNvPr id="15" name="Rectangle 14"/>
-          <p:cNvSpPr/>
-          <p:nvPr/>
-        </p:nvSpPr>
-        <p:spPr>
-          <a:xfrm>
-            <a:off x="1490472" y="2999232"/>
-            <a:ext cx="10076688" cy="566928"/>
-          </a:xfrm>
-          <a:prstGeom prst="rect">
-            <a:avLst/>
-          </a:prstGeom>
-          <a:solidFill>
-            <a:srgbClr val="FFFDF7"/>
-          </a:solidFill>
-          <a:ln w="34925">
-            <a:solidFill>
-              <a:srgbClr val="000000"/>
-            </a:solidFill>
-          </a:ln>
-          <a:effectLst/>
-        </p:spPr>
-        <p:style>
-          <a:lnRef idx="1">
-            <a:schemeClr val="accent1"/>
-          </a:lnRef>
-          <a:fillRef idx="3">
-            <a:schemeClr val="accent1"/>
-          </a:fillRef>
-          <a:effectRef idx="2">
-            <a:schemeClr val="accent1"/>
-          </a:effectRef>
-          <a:fontRef idx="minor">
-            <a:schemeClr val="lt1"/>
-          </a:fontRef>
-        </p:style>
-        <p:txBody>
-          <a:bodyPr rtlCol="0" anchor="ctr"/>
-          <a:lstStyle/>
-          <a:p/>
-        </p:txBody>
-      </p:sp>
-      <p:sp>
-        <p:nvSpPr>
-          <p:cNvPr id="16" name="TextBox 15"/>
-          <p:cNvSpPr txBox="1"/>
-          <p:nvPr/>
-        </p:nvSpPr>
-        <p:spPr>
-          <a:xfrm>
-            <a:off x="1764792" y="2999232"/>
-            <a:ext cx="9528048" cy="566928"/>
-          </a:xfrm>
-          <a:prstGeom prst="rect">
-            <a:avLst/>
-          </a:prstGeom>
-          <a:noFill/>
-        </p:spPr>
-        <p:txBody>
-          <a:bodyPr wrap="square" lIns="0" rIns="0" tIns="0" bIns="0" anchor="ctr">
-            <a:spAutoFit/>
-          </a:bodyPr>
-          <a:lstStyle/>
-          <a:p>
-            <a:pPr algn="l"/>
-            <a:r>
-              <a:rPr sz="1450">
-                <a:solidFill>
-                  <a:srgbClr val="000000"/>
-                </a:solidFill>
-                <a:latin typeface="Calibri"/>
-              </a:rPr>
-              <a:t>Write down input and output ranges, clamp and falloff — actual numbers</a:t>
-            </a:r>
-          </a:p>
-        </p:txBody>
-      </p:sp>
-      <p:sp>
-        <p:nvSpPr>
-          <p:cNvPr id="17" name="Rectangle 16"/>
-          <p:cNvSpPr/>
-          <p:nvPr/>
-        </p:nvSpPr>
-        <p:spPr>
-          <a:xfrm>
-            <a:off x="662940" y="3781044"/>
-            <a:ext cx="621792" cy="566928"/>
-          </a:xfrm>
-          <a:prstGeom prst="rect">
-            <a:avLst/>
-          </a:prstGeom>
-          <a:solidFill>
-            <a:srgbClr val="000000"/>
-          </a:solidFill>
-          <a:ln w="6350">
-            <a:solidFill>
-              <a:srgbClr val="000000"/>
-            </a:solidFill>
-          </a:ln>
-          <a:effectLst/>
-        </p:spPr>
-        <p:style>
-          <a:lnRef idx="1">
-            <a:schemeClr val="accent1"/>
-          </a:lnRef>
-          <a:fillRef idx="3">
-            <a:schemeClr val="accent1"/>
-          </a:fillRef>
-          <a:effectRef idx="2">
-            <a:schemeClr val="accent1"/>
-          </a:effectRef>
-          <a:fontRef idx="minor">
-            <a:schemeClr val="lt1"/>
-          </a:fontRef>
-        </p:style>
-        <p:txBody>
-          <a:bodyPr rtlCol="0" anchor="ctr"/>
-          <a:lstStyle/>
-          <a:p/>
-        </p:txBody>
-      </p:sp>
-      <p:sp>
-        <p:nvSpPr>
-          <p:cNvPr id="18" name="Rectangle 17"/>
-          <p:cNvSpPr/>
-          <p:nvPr/>
-        </p:nvSpPr>
-        <p:spPr>
-          <a:xfrm>
-            <a:off x="594360" y="3712464"/>
-            <a:ext cx="621792" cy="566928"/>
-          </a:xfrm>
-          <a:prstGeom prst="rect">
-            <a:avLst/>
-          </a:prstGeom>
-          <a:solidFill>
-            <a:srgbClr val="FFFDF7"/>
-          </a:solidFill>
-          <a:ln w="34925">
-            <a:solidFill>
-              <a:srgbClr val="000000"/>
-            </a:solidFill>
-          </a:ln>
-          <a:effectLst/>
-        </p:spPr>
-        <p:style>
-          <a:lnRef idx="1">
-            <a:schemeClr val="accent1"/>
-          </a:lnRef>
-          <a:fillRef idx="3">
-            <a:schemeClr val="accent1"/>
-          </a:fillRef>
-          <a:effectRef idx="2">
-            <a:schemeClr val="accent1"/>
-          </a:effectRef>
-          <a:fontRef idx="minor">
-            <a:schemeClr val="lt1"/>
-          </a:fontRef>
-        </p:style>
-        <p:txBody>
-          <a:bodyPr rtlCol="0" anchor="ctr"/>
-          <a:lstStyle/>
-          <a:p/>
-        </p:txBody>
-      </p:sp>
-      <p:sp>
-        <p:nvSpPr>
-          <p:cNvPr id="19" name="TextBox 18"/>
-          <p:cNvSpPr txBox="1"/>
-          <p:nvPr/>
-        </p:nvSpPr>
-        <p:spPr>
-          <a:xfrm>
-            <a:off x="594360" y="3895344"/>
-            <a:ext cx="621792" cy="274320"/>
-          </a:xfrm>
-          <a:prstGeom prst="rect">
-            <a:avLst/>
-          </a:prstGeom>
-          <a:noFill/>
-        </p:spPr>
-        <p:txBody>
-          <a:bodyPr wrap="square" lIns="0" rIns="0" tIns="0" bIns="0" anchor="t">
-            <a:spAutoFit/>
-          </a:bodyPr>
-          <a:lstStyle/>
-          <a:p>
-            <a:pPr algn="ctr"/>
-            <a:r>
-              <a:rPr sz="1700" b="1">
-                <a:solidFill>
-                  <a:srgbClr val="000000"/>
-                </a:solidFill>
-                <a:latin typeface="Arial"/>
-              </a:rPr>
-              <a:t>✓</a:t>
-            </a:r>
-          </a:p>
-        </p:txBody>
-      </p:sp>
-      <p:sp>
-        <p:nvSpPr>
-          <p:cNvPr id="20" name="Rectangle 19"/>
-          <p:cNvSpPr/>
-          <p:nvPr/>
-        </p:nvSpPr>
-        <p:spPr>
-          <a:xfrm>
-            <a:off x="1559051" y="3781044"/>
-            <a:ext cx="10076688" cy="566928"/>
-          </a:xfrm>
-          <a:prstGeom prst="rect">
-            <a:avLst/>
-          </a:prstGeom>
-          <a:solidFill>
-            <a:srgbClr val="000000"/>
-          </a:solidFill>
-          <a:ln w="6350">
-            <a:solidFill>
-              <a:srgbClr val="000000"/>
-            </a:solidFill>
-          </a:ln>
-          <a:effectLst/>
-        </p:spPr>
-        <p:style>
-          <a:lnRef idx="1">
-            <a:schemeClr val="accent1"/>
-          </a:lnRef>
-          <a:fillRef idx="3">
-            <a:schemeClr val="accent1"/>
-          </a:fillRef>
-          <a:effectRef idx="2">
-            <a:schemeClr val="accent1"/>
-          </a:effectRef>
-          <a:fontRef idx="minor">
-            <a:schemeClr val="lt1"/>
-          </a:fontRef>
-        </p:style>
-        <p:txBody>
-          <a:bodyPr rtlCol="0" anchor="ctr"/>
-          <a:lstStyle/>
-          <a:p/>
-        </p:txBody>
-      </p:sp>
-      <p:sp>
-        <p:nvSpPr>
-          <p:cNvPr id="21" name="Rectangle 20"/>
-          <p:cNvSpPr/>
-          <p:nvPr/>
-        </p:nvSpPr>
-        <p:spPr>
-          <a:xfrm>
-            <a:off x="1490472" y="3712464"/>
-            <a:ext cx="10076688" cy="566928"/>
-          </a:xfrm>
-          <a:prstGeom prst="rect">
-            <a:avLst/>
-          </a:prstGeom>
-          <a:solidFill>
-            <a:srgbClr val="FFFDF7"/>
-          </a:solidFill>
-          <a:ln w="34925">
-            <a:solidFill>
-              <a:srgbClr val="000000"/>
-            </a:solidFill>
-          </a:ln>
-          <a:effectLst/>
-        </p:spPr>
-        <p:style>
-          <a:lnRef idx="1">
-            <a:schemeClr val="accent1"/>
-          </a:lnRef>
-          <a:fillRef idx="3">
-            <a:schemeClr val="accent1"/>
-          </a:fillRef>
-          <a:effectRef idx="2">
-            <a:schemeClr val="accent1"/>
-          </a:effectRef>
-          <a:fontRef idx="minor">
-            <a:schemeClr val="lt1"/>
-          </a:fontRef>
-        </p:style>
-        <p:txBody>
-          <a:bodyPr rtlCol="0" anchor="ctr"/>
-          <a:lstStyle/>
-          <a:p/>
-        </p:txBody>
-      </p:sp>
-      <p:sp>
-        <p:nvSpPr>
-          <p:cNvPr id="22" name="TextBox 21"/>
-          <p:cNvSpPr txBox="1"/>
-          <p:nvPr/>
-        </p:nvSpPr>
-        <p:spPr>
-          <a:xfrm>
-            <a:off x="1764792" y="3712464"/>
-            <a:ext cx="9528048" cy="566928"/>
-          </a:xfrm>
-          <a:prstGeom prst="rect">
-            <a:avLst/>
-          </a:prstGeom>
-          <a:noFill/>
-        </p:spPr>
-        <p:txBody>
-          <a:bodyPr wrap="square" lIns="0" rIns="0" tIns="0" bIns="0" anchor="ctr">
-            <a:spAutoFit/>
-          </a:bodyPr>
-          <a:lstStyle/>
-          <a:p>
-            <a:pPr algn="l"/>
-            <a:r>
-              <a:rPr sz="1450">
-                <a:solidFill>
-                  <a:srgbClr val="000000"/>
-                </a:solidFill>
-                <a:latin typeface="Calibri"/>
-              </a:rPr>
-              <a:t>Translate the field into lines: length, rotation, spacing or hatch density</a:t>
-            </a:r>
-          </a:p>
-        </p:txBody>
-      </p:sp>
-      <p:sp>
-        <p:nvSpPr>
-          <p:cNvPr id="23" name="Rectangle 22"/>
-          <p:cNvSpPr/>
-          <p:nvPr/>
-        </p:nvSpPr>
-        <p:spPr>
-          <a:xfrm>
-            <a:off x="662940" y="4494276"/>
-            <a:ext cx="621792" cy="566928"/>
-          </a:xfrm>
-          <a:prstGeom prst="rect">
-            <a:avLst/>
-          </a:prstGeom>
-          <a:solidFill>
-            <a:srgbClr val="000000"/>
-          </a:solidFill>
-          <a:ln w="6350">
-            <a:solidFill>
-              <a:srgbClr val="000000"/>
-            </a:solidFill>
-          </a:ln>
-          <a:effectLst/>
-        </p:spPr>
-        <p:style>
-          <a:lnRef idx="1">
-            <a:schemeClr val="accent1"/>
-          </a:lnRef>
-          <a:fillRef idx="3">
-            <a:schemeClr val="accent1"/>
-          </a:fillRef>
-          <a:effectRef idx="2">
-            <a:schemeClr val="accent1"/>
-          </a:effectRef>
-          <a:fontRef idx="minor">
-            <a:schemeClr val="lt1"/>
-          </a:fontRef>
-        </p:style>
-        <p:txBody>
-          <a:bodyPr rtlCol="0" anchor="ctr"/>
-          <a:lstStyle/>
-          <a:p/>
-        </p:txBody>
-      </p:sp>
-      <p:sp>
-        <p:nvSpPr>
-          <p:cNvPr id="24" name="Rectangle 23"/>
-          <p:cNvSpPr/>
-          <p:nvPr/>
-        </p:nvSpPr>
-        <p:spPr>
-          <a:xfrm>
-            <a:off x="594360" y="4425696"/>
-            <a:ext cx="621792" cy="566928"/>
-          </a:xfrm>
-          <a:prstGeom prst="rect">
-            <a:avLst/>
-          </a:prstGeom>
-          <a:solidFill>
-            <a:srgbClr val="FFFDF7"/>
-          </a:solidFill>
-          <a:ln w="34925">
-            <a:solidFill>
-              <a:srgbClr val="000000"/>
-            </a:solidFill>
-          </a:ln>
-          <a:effectLst/>
-        </p:spPr>
-        <p:style>
-          <a:lnRef idx="1">
-            <a:schemeClr val="accent1"/>
-          </a:lnRef>
-          <a:fillRef idx="3">
-            <a:schemeClr val="accent1"/>
-          </a:fillRef>
-          <a:effectRef idx="2">
-            <a:schemeClr val="accent1"/>
-          </a:effectRef>
-          <a:fontRef idx="minor">
-            <a:schemeClr val="lt1"/>
-          </a:fontRef>
-        </p:style>
-        <p:txBody>
-          <a:bodyPr rtlCol="0" anchor="ctr"/>
-          <a:lstStyle/>
-          <a:p/>
-        </p:txBody>
-      </p:sp>
-      <p:sp>
-        <p:nvSpPr>
-          <p:cNvPr id="25" name="TextBox 24"/>
-          <p:cNvSpPr txBox="1"/>
-          <p:nvPr/>
-        </p:nvSpPr>
-        <p:spPr>
-          <a:xfrm>
-            <a:off x="594360" y="4608576"/>
-            <a:ext cx="621792" cy="274320"/>
-          </a:xfrm>
-          <a:prstGeom prst="rect">
-            <a:avLst/>
-          </a:prstGeom>
-          <a:noFill/>
-        </p:spPr>
-        <p:txBody>
-          <a:bodyPr wrap="square" lIns="0" rIns="0" tIns="0" bIns="0" anchor="t">
-            <a:spAutoFit/>
-          </a:bodyPr>
-          <a:lstStyle/>
-          <a:p>
-            <a:pPr algn="ctr"/>
-            <a:r>
-              <a:rPr sz="1700" b="1">
-                <a:solidFill>
-                  <a:srgbClr val="000000"/>
-                </a:solidFill>
-                <a:latin typeface="Arial"/>
-              </a:rPr>
-              <a:t>✓</a:t>
-            </a:r>
-          </a:p>
-        </p:txBody>
-      </p:sp>
-      <p:sp>
-        <p:nvSpPr>
-          <p:cNvPr id="26" name="Rectangle 25"/>
-          <p:cNvSpPr/>
-          <p:nvPr/>
-        </p:nvSpPr>
-        <p:spPr>
-          <a:xfrm>
-            <a:off x="1559051" y="4494276"/>
-            <a:ext cx="10076688" cy="566928"/>
-          </a:xfrm>
-          <a:prstGeom prst="rect">
-            <a:avLst/>
-          </a:prstGeom>
-          <a:solidFill>
-            <a:srgbClr val="000000"/>
-          </a:solidFill>
-          <a:ln w="6350">
-            <a:solidFill>
-              <a:srgbClr val="000000"/>
-            </a:solidFill>
-          </a:ln>
-          <a:effectLst/>
-        </p:spPr>
-        <p:style>
-          <a:lnRef idx="1">
-            <a:schemeClr val="accent1"/>
-          </a:lnRef>
-          <a:fillRef idx="3">
-            <a:schemeClr val="accent1"/>
-          </a:fillRef>
-          <a:effectRef idx="2">
-            <a:schemeClr val="accent1"/>
-          </a:effectRef>
-          <a:fontRef idx="minor">
-            <a:schemeClr val="lt1"/>
-          </a:fontRef>
-        </p:style>
-        <p:txBody>
-          <a:bodyPr rtlCol="0" anchor="ctr"/>
-          <a:lstStyle/>
-          <a:p/>
-        </p:txBody>
-      </p:sp>
-      <p:sp>
-        <p:nvSpPr>
-          <p:cNvPr id="27" name="Rectangle 26"/>
-          <p:cNvSpPr/>
-          <p:nvPr/>
-        </p:nvSpPr>
-        <p:spPr>
-          <a:xfrm>
-            <a:off x="1490472" y="4425696"/>
-            <a:ext cx="10076688" cy="566928"/>
-          </a:xfrm>
-          <a:prstGeom prst="rect">
-            <a:avLst/>
-          </a:prstGeom>
-          <a:solidFill>
-            <a:srgbClr val="FFFDF7"/>
-          </a:solidFill>
-          <a:ln w="34925">
-            <a:solidFill>
-              <a:srgbClr val="000000"/>
-            </a:solidFill>
-          </a:ln>
-          <a:effectLst/>
-        </p:spPr>
-        <p:style>
-          <a:lnRef idx="1">
-            <a:schemeClr val="accent1"/>
-          </a:lnRef>
-          <a:fillRef idx="3">
-            <a:schemeClr val="accent1"/>
-          </a:fillRef>
-          <a:effectRef idx="2">
-            <a:schemeClr val="accent1"/>
-          </a:effectRef>
-          <a:fontRef idx="minor">
-            <a:schemeClr val="lt1"/>
-          </a:fontRef>
-        </p:style>
-        <p:txBody>
-          <a:bodyPr rtlCol="0" anchor="ctr"/>
-          <a:lstStyle/>
-          <a:p/>
-        </p:txBody>
-      </p:sp>
-      <p:sp>
-        <p:nvSpPr>
-          <p:cNvPr id="28" name="TextBox 27"/>
-          <p:cNvSpPr txBox="1"/>
-          <p:nvPr/>
-        </p:nvSpPr>
-        <p:spPr>
-          <a:xfrm>
-            <a:off x="1764792" y="4425696"/>
-            <a:ext cx="9528048" cy="566928"/>
-          </a:xfrm>
-          <a:prstGeom prst="rect">
-            <a:avLst/>
-          </a:prstGeom>
-          <a:noFill/>
-        </p:spPr>
-        <p:txBody>
-          <a:bodyPr wrap="square" lIns="0" rIns="0" tIns="0" bIns="0" anchor="ctr">
-            <a:spAutoFit/>
-          </a:bodyPr>
-          <a:lstStyle/>
-          <a:p>
-            <a:pPr algn="l"/>
-            <a:r>
-              <a:rPr sz="1450">
-                <a:solidFill>
-                  <a:srgbClr val="000000"/>
-                </a:solidFill>
-                <a:latin typeface="Calibri"/>
-              </a:rPr>
-              <a:t>Export an SVG at plotted size and measure one known line</a:t>
-            </a:r>
-          </a:p>
-        </p:txBody>
-      </p:sp>
-      <p:sp>
-        <p:nvSpPr>
-          <p:cNvPr id="29" name="Rectangle 28"/>
-          <p:cNvSpPr/>
-          <p:nvPr/>
-        </p:nvSpPr>
-        <p:spPr>
-          <a:xfrm>
-            <a:off x="662940" y="5207508"/>
-            <a:ext cx="621792" cy="566928"/>
-          </a:xfrm>
-          <a:prstGeom prst="rect">
-            <a:avLst/>
-          </a:prstGeom>
-          <a:solidFill>
-            <a:srgbClr val="000000"/>
-          </a:solidFill>
-          <a:ln w="6350">
-            <a:solidFill>
-              <a:srgbClr val="000000"/>
-            </a:solidFill>
-          </a:ln>
-          <a:effectLst/>
-        </p:spPr>
-        <p:style>
-          <a:lnRef idx="1">
-            <a:schemeClr val="accent1"/>
-          </a:lnRef>
-          <a:fillRef idx="3">
-            <a:schemeClr val="accent1"/>
-          </a:fillRef>
-          <a:effectRef idx="2">
-            <a:schemeClr val="accent1"/>
-          </a:effectRef>
-          <a:fontRef idx="minor">
-            <a:schemeClr val="lt1"/>
-          </a:fontRef>
-        </p:style>
-        <p:txBody>
-          <a:bodyPr rtlCol="0" anchor="ctr"/>
-          <a:lstStyle/>
-          <a:p/>
-        </p:txBody>
-      </p:sp>
-      <p:sp>
-        <p:nvSpPr>
-          <p:cNvPr id="30" name="Rectangle 29"/>
-          <p:cNvSpPr/>
-          <p:nvPr/>
-        </p:nvSpPr>
-        <p:spPr>
-          <a:xfrm>
-            <a:off x="594360" y="5138928"/>
-            <a:ext cx="621792" cy="566928"/>
-          </a:xfrm>
-          <a:prstGeom prst="rect">
-            <a:avLst/>
-          </a:prstGeom>
-          <a:solidFill>
-            <a:srgbClr val="FFFDF7"/>
-          </a:solidFill>
-          <a:ln w="34925">
-            <a:solidFill>
-              <a:srgbClr val="000000"/>
-            </a:solidFill>
-          </a:ln>
-          <a:effectLst/>
-        </p:spPr>
-        <p:style>
-          <a:lnRef idx="1">
-            <a:schemeClr val="accent1"/>
-          </a:lnRef>
-          <a:fillRef idx="3">
-            <a:schemeClr val="accent1"/>
-          </a:fillRef>
-          <a:effectRef idx="2">
-            <a:schemeClr val="accent1"/>
-          </a:effectRef>
-          <a:fontRef idx="minor">
-            <a:schemeClr val="lt1"/>
-          </a:fontRef>
-        </p:style>
-        <p:txBody>
-          <a:bodyPr rtlCol="0" anchor="ctr"/>
-          <a:lstStyle/>
-          <a:p/>
-        </p:txBody>
-      </p:sp>
-      <p:sp>
-        <p:nvSpPr>
-          <p:cNvPr id="31" name="TextBox 30"/>
-          <p:cNvSpPr txBox="1"/>
-          <p:nvPr/>
-        </p:nvSpPr>
-        <p:spPr>
-          <a:xfrm>
-            <a:off x="594360" y="5321808"/>
-            <a:ext cx="621792" cy="274320"/>
-          </a:xfrm>
-          <a:prstGeom prst="rect">
-            <a:avLst/>
-          </a:prstGeom>
-          <a:noFill/>
-        </p:spPr>
-        <p:txBody>
-          <a:bodyPr wrap="square" lIns="0" rIns="0" tIns="0" bIns="0" anchor="t">
-            <a:spAutoFit/>
-          </a:bodyPr>
-          <a:lstStyle/>
-          <a:p>
-            <a:pPr algn="ctr"/>
-            <a:r>
-              <a:rPr sz="1700" b="1">
-                <a:solidFill>
-                  <a:srgbClr val="000000"/>
-                </a:solidFill>
-                <a:latin typeface="Arial"/>
-              </a:rPr>
-              <a:t>✓</a:t>
-            </a:r>
-          </a:p>
-        </p:txBody>
-      </p:sp>
-      <p:sp>
-        <p:nvSpPr>
-          <p:cNvPr id="32" name="Rectangle 31"/>
-          <p:cNvSpPr/>
-          <p:nvPr/>
-        </p:nvSpPr>
-        <p:spPr>
-          <a:xfrm>
-            <a:off x="1559051" y="5207508"/>
-            <a:ext cx="10076688" cy="566928"/>
-          </a:xfrm>
-          <a:prstGeom prst="rect">
-            <a:avLst/>
-          </a:prstGeom>
-          <a:solidFill>
-            <a:srgbClr val="000000"/>
-          </a:solidFill>
-          <a:ln w="6350">
-            <a:solidFill>
-              <a:srgbClr val="000000"/>
-            </a:solidFill>
-          </a:ln>
-          <a:effectLst/>
-        </p:spPr>
-        <p:style>
-          <a:lnRef idx="1">
-            <a:schemeClr val="accent1"/>
-          </a:lnRef>
-          <a:fillRef idx="3">
-            <a:schemeClr val="accent1"/>
-          </a:fillRef>
-          <a:effectRef idx="2">
-            <a:schemeClr val="accent1"/>
-          </a:effectRef>
-          <a:fontRef idx="minor">
-            <a:schemeClr val="lt1"/>
-          </a:fontRef>
-        </p:style>
-        <p:txBody>
-          <a:bodyPr rtlCol="0" anchor="ctr"/>
-          <a:lstStyle/>
-          <a:p/>
-        </p:txBody>
-      </p:sp>
-      <p:sp>
-        <p:nvSpPr>
-          <p:cNvPr id="33" name="Rectangle 32"/>
-          <p:cNvSpPr/>
-          <p:nvPr/>
-        </p:nvSpPr>
-        <p:spPr>
-          <a:xfrm>
-            <a:off x="1490472" y="5138928"/>
-            <a:ext cx="10076688" cy="566928"/>
-          </a:xfrm>
-          <a:prstGeom prst="rect">
-            <a:avLst/>
-          </a:prstGeom>
-          <a:solidFill>
-            <a:srgbClr val="FFFDF7"/>
-          </a:solidFill>
-          <a:ln w="34925">
-            <a:solidFill>
-              <a:srgbClr val="000000"/>
-            </a:solidFill>
-          </a:ln>
-          <a:effectLst/>
-        </p:spPr>
-        <p:style>
-          <a:lnRef idx="1">
-            <a:schemeClr val="accent1"/>
-          </a:lnRef>
-          <a:fillRef idx="3">
-            <a:schemeClr val="accent1"/>
-          </a:fillRef>
-          <a:effectRef idx="2">
-            <a:schemeClr val="accent1"/>
-          </a:effectRef>
-          <a:fontRef idx="minor">
-            <a:schemeClr val="lt1"/>
-          </a:fontRef>
-        </p:style>
-        <p:txBody>
-          <a:bodyPr rtlCol="0" anchor="ctr"/>
-          <a:lstStyle/>
-          <a:p/>
-        </p:txBody>
-      </p:sp>
-      <p:sp>
-        <p:nvSpPr>
-          <p:cNvPr id="34" name="TextBox 33"/>
-          <p:cNvSpPr txBox="1"/>
-          <p:nvPr/>
-        </p:nvSpPr>
-        <p:spPr>
-          <a:xfrm>
-            <a:off x="1764792" y="5138928"/>
-            <a:ext cx="9528048" cy="566928"/>
-          </a:xfrm>
-          <a:prstGeom prst="rect">
-            <a:avLst/>
-          </a:prstGeom>
-          <a:noFill/>
-        </p:spPr>
-        <p:txBody>
-          <a:bodyPr wrap="square" lIns="0" rIns="0" tIns="0" bIns="0" anchor="ctr">
-            <a:spAutoFit/>
-          </a:bodyPr>
-          <a:lstStyle/>
-          <a:p>
-            <a:pPr algn="l"/>
-            <a:r>
-              <a:rPr sz="1450">
-                <a:solidFill>
-                  <a:srgbClr val="000000"/>
-                </a:solidFill>
-                <a:latin typeface="Calibri"/>
-              </a:rPr>
-              <a:t>Run a small test plot and compare it with the screen</a:t>
-            </a:r>
-          </a:p>
-        </p:txBody>
-      </p:sp>
-      <p:sp>
-        <p:nvSpPr>
-          <p:cNvPr id="35" name="Rectangle 34"/>
-          <p:cNvSpPr/>
-          <p:nvPr/>
-        </p:nvSpPr>
-        <p:spPr>
-          <a:xfrm>
-            <a:off x="662940" y="6012180"/>
-            <a:ext cx="8412480" cy="566928"/>
-          </a:xfrm>
-          <a:prstGeom prst="rect">
-            <a:avLst/>
-          </a:prstGeom>
-          <a:solidFill>
-            <a:srgbClr val="000000"/>
-          </a:solidFill>
-          <a:ln w="6350">
-            <a:solidFill>
-              <a:srgbClr val="000000"/>
-            </a:solidFill>
-          </a:ln>
-          <a:effectLst/>
-        </p:spPr>
-        <p:style>
-          <a:lnRef idx="1">
-            <a:schemeClr val="accent1"/>
-          </a:lnRef>
-          <a:fillRef idx="3">
-            <a:schemeClr val="accent1"/>
-          </a:fillRef>
-          <a:effectRef idx="2">
-            <a:schemeClr val="accent1"/>
-          </a:effectRef>
-          <a:fontRef idx="minor">
-            <a:schemeClr val="lt1"/>
-          </a:fontRef>
-        </p:style>
-        <p:txBody>
-          <a:bodyPr rtlCol="0" anchor="ctr"/>
-          <a:lstStyle/>
-          <a:p/>
-        </p:txBody>
-      </p:sp>
-      <p:sp>
-        <p:nvSpPr>
-          <p:cNvPr id="36" name="Rectangle 35"/>
-          <p:cNvSpPr/>
-          <p:nvPr/>
-        </p:nvSpPr>
-        <p:spPr>
-          <a:xfrm>
-            <a:off x="594360" y="5943600"/>
-            <a:ext cx="8412480" cy="566928"/>
-          </a:xfrm>
-          <a:prstGeom prst="rect">
-            <a:avLst/>
-          </a:prstGeom>
-          <a:solidFill>
-            <a:srgbClr val="000000"/>
-          </a:solidFill>
-          <a:ln w="34925">
-            <a:solidFill>
-              <a:srgbClr val="000000"/>
-            </a:solidFill>
-          </a:ln>
-          <a:effectLst/>
-        </p:spPr>
-        <p:style>
-          <a:lnRef idx="1">
-            <a:schemeClr val="accent1"/>
-          </a:lnRef>
-          <a:fillRef idx="3">
-            <a:schemeClr val="accent1"/>
-          </a:fillRef>
-          <a:effectRef idx="2">
-            <a:schemeClr val="accent1"/>
-          </a:effectRef>
-          <a:fontRef idx="minor">
-            <a:schemeClr val="lt1"/>
-          </a:fontRef>
-        </p:style>
-        <p:txBody>
-          <a:bodyPr rtlCol="0" anchor="ctr"/>
-          <a:lstStyle/>
-          <a:p/>
-        </p:txBody>
-      </p:sp>
-      <p:sp>
-        <p:nvSpPr>
-          <p:cNvPr id="37" name="TextBox 36"/>
-          <p:cNvSpPr txBox="1"/>
-          <p:nvPr/>
-        </p:nvSpPr>
-        <p:spPr>
-          <a:xfrm>
-            <a:off x="594360" y="5943600"/>
-            <a:ext cx="8412480" cy="566928"/>
-          </a:xfrm>
-          <a:prstGeom prst="rect">
-            <a:avLst/>
-          </a:prstGeom>
-          <a:noFill/>
-        </p:spPr>
-        <p:txBody>
-          <a:bodyPr wrap="square" lIns="0" rIns="0" tIns="0" bIns="0" anchor="ctr">
-            <a:spAutoFit/>
-          </a:bodyPr>
-          <a:lstStyle/>
-          <a:p>
-            <a:pPr algn="ctr"/>
-            <a:r>
-              <a:rPr sz="1300" b="1">
-                <a:solidFill>
-                  <a:srgbClr val="C6F035"/>
-                </a:solidFill>
-                <a:latin typeface="Arial"/>
-              </a:rPr>
-              <a:t>MOVE THE ATTRACTOR. IF YOU CANNOT PREDICT WHAT HAPPENS, STOP AND READ THE FIELD.</a:t>
-            </a:r>
-          </a:p>
-        </p:txBody>
-      </p:sp>
-    </p:spTree>
-  </p:cSld>
-  <p:clrMapOvr>
-    <a:masterClrMapping/>
-  </p:clrMapOvr>
-</p:sld>
-</file>
-
-<file path=ppt/slides/slide14.xml><?xml version="1.0" encoding="utf-8"?>
-<p:sld xmlns:a="http://schemas.openxmlformats.org/drawingml/2006/main" xmlns:p="http://schemas.openxmlformats.org/presentationml/2006/main" xmlns:r="http://schemas.openxmlformats.org/officeDocument/2006/relationships">
-  <p:cSld>
-    <p:bg>
-      <p:bgPr>
-        <a:solidFill>
-          <a:srgbClr val="FFFDF7"/>
-        </a:solidFill>
-        <a:effectLst/>
-      </p:bgPr>
-    </p:bg>
-    <p:spTree>
-      <p:nvGrpSpPr>
-        <p:cNvPr id="1" name=""/>
-        <p:cNvGrpSpPr/>
-        <p:nvPr/>
-      </p:nvGrpSpPr>
-      <p:grpSpPr/>
-      <p:sp>
-        <p:nvSpPr>
-          <p:cNvPr id="2" name="Rectangle 1"/>
-          <p:cNvSpPr/>
-          <p:nvPr/>
-        </p:nvSpPr>
-        <p:spPr>
-          <a:xfrm>
-            <a:off x="594360" y="566928"/>
-            <a:ext cx="10972800" cy="0"/>
-          </a:xfrm>
-          <a:prstGeom prst="rect">
-            <a:avLst/>
-          </a:prstGeom>
-          <a:noFill/>
-          <a:ln w="50800">
-            <a:solidFill>
-              <a:srgbClr val="000000"/>
-            </a:solidFill>
-          </a:ln>
-          <a:effectLst/>
-        </p:spPr>
-        <p:style>
-          <a:lnRef idx="1">
-            <a:schemeClr val="accent1"/>
-          </a:lnRef>
-          <a:fillRef idx="3">
-            <a:schemeClr val="accent1"/>
-          </a:fillRef>
-          <a:effectRef idx="2">
-            <a:schemeClr val="accent1"/>
-          </a:effectRef>
-          <a:fontRef idx="minor">
-            <a:schemeClr val="lt1"/>
-          </a:fontRef>
-        </p:style>
-        <p:txBody>
-          <a:bodyPr rtlCol="0" anchor="ctr"/>
-          <a:lstStyle/>
-          <a:p>
-            <a:pPr algn="ctr"/>
-          </a:p>
-        </p:txBody>
-      </p:sp>
-      <p:sp>
-        <p:nvSpPr>
-          <p:cNvPr id="3" name="TextBox 2"/>
-          <p:cNvSpPr txBox="1"/>
-          <p:nvPr/>
-        </p:nvSpPr>
-        <p:spPr>
-          <a:xfrm>
-            <a:off x="594360" y="676656"/>
-            <a:ext cx="10972800" cy="566928"/>
-          </a:xfrm>
-          <a:prstGeom prst="rect">
-            <a:avLst/>
-          </a:prstGeom>
-          <a:noFill/>
-        </p:spPr>
-        <p:txBody>
-          <a:bodyPr wrap="square" lIns="0" rIns="0" tIns="0" bIns="0" anchor="t">
-            <a:spAutoFit/>
-          </a:bodyPr>
-          <a:lstStyle/>
-          <a:p>
-            <a:pPr algn="l"/>
-            <a:r>
-              <a:rPr sz="3300" b="1">
-                <a:solidFill>
-                  <a:srgbClr val="000000"/>
-                </a:solidFill>
-                <a:latin typeface="Arial"/>
-              </a:rPr>
               <a:t>BEFORE NEXT CLASS</a:t>
             </a:r>
           </a:p>
@@ -9636,7 +6964,7 @@
                 </a:solidFill>
                 <a:latin typeface="Calibri"/>
               </a:rPr>
-              <a:t>Week 9 — Oct 20: site analysis with Mixtli, the Blender add-on the instructor provides.</a:t>
+              <a:t>Week 9 — Oct 20: layered site analysis — map a site's point cloud in layers with attractor logic. P3d is issued.</a:t>
             </a:r>
           </a:p>
         </p:txBody>
@@ -9886,7 +7214,7 @@
                 </a:solidFill>
                 <a:latin typeface="Calibri"/>
               </a:rPr>
-              <a:t>Checkpoint next class. Bring a grayscale field, the line translation and a small test plot.</a:t>
+              <a:t>Checkpoint next class. Bring the grayscale field and a first line drawing of it.</a:t>
             </a:r>
           </a:p>
         </p:txBody>
@@ -10009,7 +7337,7 @@
                 </a:solidFill>
                 <a:latin typeface="Arial"/>
               </a:rPr>
-              <a:t>P3d</a:t>
+              <a:t>DEADLINE</a:t>
             </a:r>
           </a:p>
         </p:txBody>
@@ -10136,7 +7464,7 @@
                 </a:solidFill>
                 <a:latin typeface="Calibri"/>
               </a:rPr>
-              <a:t>Checkpoint next class. Bring your chosen site, one Mixtli analysis with a legend and a stated analysis question.</a:t>
+              <a:t>Week 10 — Oct 27 is the mid-semester deadline. GSM, P2b and P3c are due, and everything through Arrays must be in.</a:t>
             </a:r>
           </a:p>
         </p:txBody>
@@ -10259,7 +7587,7 @@
                 </a:solidFill>
                 <a:latin typeface="Arial"/>
               </a:rPr>
-              <a:t>MIDTERM</a:t>
+              <a:t>SITE</a:t>
             </a:r>
           </a:p>
         </p:txBody>
@@ -10386,7 +7714,7 @@
                 </a:solidFill>
                 <a:latin typeface="Calibri"/>
               </a:rPr>
-              <a:t>Week 10 — Oct 27: midterm review of Projects 1–3. Due then: GSM, P2b, P3c, P3d and MID. Do not leave prints or plots to the last week.</a:t>
+              <a:t>Think of a site you can document. P3d starts from its point cloud.</a:t>
             </a:r>
           </a:p>
         </p:txBody>
@@ -30595,7 +27923,7 @@
                 </a:solidFill>
                 <a:latin typeface="Arial"/>
               </a:rPr>
-              <a:t>A PLOTTER DRAWS LINES, NOT PIXELS</a:t>
+              <a:t>A LINE DRAWING IS LINES, NOT PIXELS</a:t>
             </a:r>
           </a:p>
         </p:txBody>
@@ -30630,7 +27958,7 @@
                 </a:solidFill>
                 <a:latin typeface="Calibri"/>
               </a:rPr>
-              <a:t>A screen can show any grey. A pen is either down or up.</a:t>
+              <a:t>A screen can show any grey. A line, drawn or plotted, is either there or not.</a:t>
             </a:r>
           </a:p>
         </p:txBody>
@@ -31399,7 +28727,7 @@
                 </a:solidFill>
                 <a:latin typeface="Arial"/>
               </a:rPr>
-              <a:t>ON PAPER — A STROKE OR NOTHING</a:t>
+              <a:t>AS LINES — A STROKE OR NOTHING</a:t>
             </a:r>
           </a:p>
         </p:txBody>
@@ -33217,7 +30545,7 @@
                 </a:solidFill>
                 <a:latin typeface="Arial"/>
               </a:rPr>
-              <a:t>SO THE FIELD MUST BECOME GEOMETRY: CURVES WITH A START AND AN END. AN IMAGE WILL NOT PLOT.</a:t>
+              <a:t>SO THE FIELD MUST BECOME GEOMETRY: CURVES WITH A START AND AN END. THAT IS WHAT THE SVG HOLDS.</a:t>
             </a:r>
           </a:p>
         </p:txBody>
@@ -33256,7 +30584,7 @@
                 </a:solidFill>
                 <a:latin typeface="Calibri"/>
               </a:rPr>
-              <a:t>The grayscale field stays on the sheet as the legend. The line drawing is what the pen draws.</a:t>
+              <a:t>The grayscale field stays on the sheet, with its legend, beside the line drawing. The lines are what you submit as SVG — and what a pen plotter could draw.</a:t>
             </a:r>
           </a:p>
         </p:txBody>
@@ -38127,7 +35455,7 @@
                 </a:solidFill>
                 <a:latin typeface="Arial"/>
               </a:rPr>
-              <a:t>EXPORT AT SIZE. TEST SMALL. FIX IT IN THE SVG.</a:t>
+              <a:t>EXPORT THE SVG AT SIZE. PLOTTING IS OPTIONAL.</a:t>
             </a:r>
           </a:p>
         </p:txBody>
@@ -38162,7 +35490,7 @@
                 </a:solidFill>
                 <a:latin typeface="Calibri"/>
               </a:rPr>
-              <a:t>The SVG is the drawing the plotter receives. Check it before the pen touches paper.</a:t>
+              <a:t>The SVG is required. If you choose to plot it, test small before the pen touches paper.</a:t>
             </a:r>
           </a:p>
         </p:txBody>
@@ -38557,7 +35885,7 @@
                 </a:solidFill>
                 <a:latin typeface="Calibri"/>
               </a:rPr>
-              <a:t>17 × 11 in, or the confirmed plotter size, at 100%.</a:t>
+              <a:t>17 × 11 in, the sheet size, at 100%.</a:t>
             </a:r>
           </a:p>
         </p:txBody>
@@ -39066,7 +36394,7 @@
                 </a:solidFill>
                 <a:latin typeface="Arial"/>
               </a:rPr>
-              <a:t>02   TEST PLOT SMALL FIRST</a:t>
+              <a:t>02   OPTIONAL — TEST PLOT SMALL FIRST</a:t>
             </a:r>
           </a:p>
         </p:txBody>
@@ -39671,7 +36999,7 @@
                 </a:solidFill>
                 <a:latin typeface="Arial"/>
               </a:rPr>
-              <a:t>03   COMMON PROBLEMS — EACH ONE IS VISIBLE IN THE SVG BEFORE IT IS ON PAPER</a:t>
+              <a:t>03   COMMON PROBLEMS — EACH ONE IS VISIBLE IN THE SVG BEFORE IT IS PRINTED OR PLOTTED</a:t>
             </a:r>
           </a:p>
         </p:txBody>
@@ -40855,7 +38183,7 @@
                 </a:solidFill>
                 <a:latin typeface="Arial"/>
               </a:rPr>
-              <a:t>P3c — ATTRACTOR: 2D FIELD PLOTTER DRAWING</a:t>
+              <a:t>P3c — ATTRACTOR: 2D FIELD DRAWING</a:t>
             </a:r>
           </a:p>
         </p:txBody>
@@ -40973,7 +38301,7 @@
                 </a:solidFill>
                 <a:latin typeface="Calibri"/>
               </a:rPr>
-              <a:t>Take the field off the screen. Sample it on a flat grid, turn every value into a line, and let a pen plotter draw it. Same grid, same mapping, three attractors: the drawing shows what the attractor alone changes.</a:t>
+              <a:t>Sample a field on a flat grid, turn every value into a line, and present the line drawing beside its grayscale field on one sheet. Same grid, same mapping, three attractors: the drawing shows what the attractor alone changes.</a:t>
             </a:r>
           </a:p>
         </p:txBody>
@@ -41666,7 +38994,7 @@
                 </a:solidFill>
                 <a:latin typeface="Arial"/>
               </a:rPr>
-              <a:t>PLOT</a:t>
+              <a:t>SHEET</a:t>
             </a:r>
           </a:p>
         </p:txBody>
@@ -41789,7 +39117,7 @@
                 </a:solidFill>
                 <a:latin typeface="Arial"/>
               </a:rPr>
-              <a:t>SVG TO PAPER</a:t>
+              <a:t>ONE 17 × 11</a:t>
             </a:r>
           </a:p>
         </p:txBody>
@@ -41828,7 +39156,7 @@
                 </a:solidFill>
                 <a:latin typeface="Calibri"/>
               </a:rPr>
-              <a:t>Export at plotted size, test small, then plot the sheet.</a:t>
+              <a:t>Line drawing, field and legend. SVG submitted. Plotting is optional.</a:t>
             </a:r>
           </a:p>
         </p:txBody>
